--- a/Main/Study/First Sem/All Notes and Resources Combined/NN Notes/Unit -2 Linear Models.pptx
+++ b/Main/Study/First Sem/All Notes and Resources Combined/NN Notes/Unit -2 Linear Models.pptx
@@ -146,6 +146,65 @@
 </p:presentation>
 </file>
 
+<file path=ppt/changesInfos/changesInfo1.xml><?xml version="1.0" encoding="utf-8"?>
+<pc:chgInfo xmlns:a="http://schemas.openxmlformats.org/drawingml/2006/main" xmlns:r="http://schemas.openxmlformats.org/officeDocument/2006/relationships" xmlns:ac="http://schemas.microsoft.com/office/drawing/2013/main/command" xmlns:pc="http://schemas.microsoft.com/office/powerpoint/2013/main/command">
+  <pc:docChgLst>
+    <pc:chgData name="Yujan Basnet" userId="495fd8277ebfbaef" providerId="LiveId" clId="{B113CF47-E64F-40D0-B077-135A174AF815}"/>
+    <pc:docChg chg="custSel modSld">
+      <pc:chgData name="Yujan Basnet" userId="495fd8277ebfbaef" providerId="LiveId" clId="{B113CF47-E64F-40D0-B077-135A174AF815}" dt="2025-06-29T01:57:27.031" v="8" actId="207"/>
+      <pc:docMkLst>
+        <pc:docMk/>
+      </pc:docMkLst>
+      <pc:sldChg chg="modSp mod">
+        <pc:chgData name="Yujan Basnet" userId="495fd8277ebfbaef" providerId="LiveId" clId="{B113CF47-E64F-40D0-B077-135A174AF815}" dt="2025-06-28T09:58:56.247" v="5" actId="207"/>
+        <pc:sldMkLst>
+          <pc:docMk/>
+          <pc:sldMk cId="3497898020" sldId="374"/>
+        </pc:sldMkLst>
+        <pc:spChg chg="mod">
+          <ac:chgData name="Yujan Basnet" userId="495fd8277ebfbaef" providerId="LiveId" clId="{B113CF47-E64F-40D0-B077-135A174AF815}" dt="2025-06-28T09:58:56.247" v="5" actId="207"/>
+          <ac:spMkLst>
+            <pc:docMk/>
+            <pc:sldMk cId="3497898020" sldId="374"/>
+            <ac:spMk id="5" creationId="{00000000-0000-0000-0000-000000000000}"/>
+          </ac:spMkLst>
+        </pc:spChg>
+      </pc:sldChg>
+      <pc:sldChg chg="modSp mod">
+        <pc:chgData name="Yujan Basnet" userId="495fd8277ebfbaef" providerId="LiveId" clId="{B113CF47-E64F-40D0-B077-135A174AF815}" dt="2025-06-29T01:57:27.031" v="8" actId="207"/>
+        <pc:sldMkLst>
+          <pc:docMk/>
+          <pc:sldMk cId="3939376623" sldId="378"/>
+        </pc:sldMkLst>
+        <pc:spChg chg="mod">
+          <ac:chgData name="Yujan Basnet" userId="495fd8277ebfbaef" providerId="LiveId" clId="{B113CF47-E64F-40D0-B077-135A174AF815}" dt="2025-06-29T01:57:27.031" v="8" actId="207"/>
+          <ac:spMkLst>
+            <pc:docMk/>
+            <pc:sldMk cId="3939376623" sldId="378"/>
+            <ac:spMk id="9" creationId="{00000000-0000-0000-0000-000000000000}"/>
+          </ac:spMkLst>
+        </pc:spChg>
+      </pc:sldChg>
+      <pc:sldChg chg="addSp delSp mod">
+        <pc:chgData name="Yujan Basnet" userId="495fd8277ebfbaef" providerId="LiveId" clId="{B113CF47-E64F-40D0-B077-135A174AF815}" dt="2025-06-28T10:46:41.187" v="7" actId="478"/>
+        <pc:sldMkLst>
+          <pc:docMk/>
+          <pc:sldMk cId="4278161283" sldId="389"/>
+        </pc:sldMkLst>
+        <pc:picChg chg="add del">
+          <ac:chgData name="Yujan Basnet" userId="495fd8277ebfbaef" providerId="LiveId" clId="{B113CF47-E64F-40D0-B077-135A174AF815}" dt="2025-06-28T10:46:41.187" v="7" actId="478"/>
+          <ac:picMkLst>
+            <pc:docMk/>
+            <pc:sldMk cId="4278161283" sldId="389"/>
+            <ac:picMk id="8" creationId="{CBFCE85F-7608-17FF-06AD-EFBAA5BAB5AE}"/>
+          </ac:picMkLst>
+        </pc:picChg>
+      </pc:sldChg>
+    </pc:docChg>
+  </pc:docChgLst>
+</pc:chgInfo>
+</file>
+
 <file path=ppt/notesMasters/notesMaster1.xml><?xml version="1.0" encoding="utf-8"?>
 <p:notesMaster xmlns:a="http://schemas.openxmlformats.org/drawingml/2006/main" xmlns:r="http://schemas.openxmlformats.org/officeDocument/2006/relationships" xmlns:p="http://schemas.openxmlformats.org/presentationml/2006/main">
   <p:cSld>
@@ -229,7 +288,7 @@
             <a:fld id="{226EBE57-06B5-493A-882E-E27946C0749C}" type="datetimeFigureOut">
               <a:rPr lang="en-US" smtClean="0"/>
               <a:pPr/>
-              <a:t>5/6/2025</a:t>
+              <a:t>6/29/2025</a:t>
             </a:fld>
             <a:endParaRPr lang="en-US"/>
           </a:p>
@@ -295,38 +354,37 @@
           <a:p>
             <a:pPr lvl="0"/>
             <a:r>
-              <a:rPr lang="en-US" smtClean="0"/>
+              <a:rPr lang="en-US"/>
               <a:t>Click to edit Master text styles</a:t>
             </a:r>
           </a:p>
           <a:p>
             <a:pPr lvl="1"/>
             <a:r>
-              <a:rPr lang="en-US" smtClean="0"/>
+              <a:rPr lang="en-US"/>
               <a:t>Second level</a:t>
             </a:r>
           </a:p>
           <a:p>
             <a:pPr lvl="2"/>
             <a:r>
-              <a:rPr lang="en-US" smtClean="0"/>
+              <a:rPr lang="en-US"/>
               <a:t>Third level</a:t>
             </a:r>
           </a:p>
           <a:p>
             <a:pPr lvl="3"/>
             <a:r>
-              <a:rPr lang="en-US" smtClean="0"/>
+              <a:rPr lang="en-US"/>
               <a:t>Fourth level</a:t>
             </a:r>
           </a:p>
           <a:p>
             <a:pPr lvl="4"/>
             <a:r>
-              <a:rPr lang="en-US" smtClean="0"/>
+              <a:rPr lang="en-US"/>
               <a:t>Fifth level</a:t>
             </a:r>
-            <a:endParaRPr lang="en-US"/>
           </a:p>
         </p:txBody>
       </p:sp>
@@ -623,10 +681,9 @@
           <a:lstStyle/>
           <a:p>
             <a:r>
-              <a:rPr lang="en-US" smtClean="0"/>
+              <a:rPr lang="en-US"/>
               <a:t>Click to edit Master title style</a:t>
             </a:r>
-            <a:endParaRPr lang="en-US"/>
           </a:p>
         </p:txBody>
       </p:sp>
@@ -742,10 +799,9 @@
           </a:lstStyle>
           <a:p>
             <a:r>
-              <a:rPr lang="en-US" smtClean="0"/>
+              <a:rPr lang="en-US"/>
               <a:t>Click to edit Master subtitle style</a:t>
             </a:r>
-            <a:endParaRPr lang="en-US"/>
           </a:p>
         </p:txBody>
       </p:sp>
@@ -766,7 +822,7 @@
           <a:p>
             <a:fld id="{E8314016-40D0-4842-9A52-81A6F1767BAB}" type="datetime1">
               <a:rPr lang="en-US" smtClean="0"/>
-              <a:t>5/6/2025</a:t>
+              <a:t>6/29/2025</a:t>
             </a:fld>
             <a:endParaRPr lang="en-US"/>
           </a:p>
@@ -788,10 +844,9 @@
           <a:lstStyle/>
           <a:p>
             <a:r>
-              <a:rPr lang="en-US" smtClean="0"/>
+              <a:rPr lang="en-US"/>
               <a:t>By: Arjun Singh Saud</a:t>
             </a:r>
-            <a:endParaRPr lang="en-US"/>
           </a:p>
         </p:txBody>
       </p:sp>
@@ -861,10 +916,9 @@
           <a:lstStyle/>
           <a:p>
             <a:r>
-              <a:rPr lang="en-US" smtClean="0"/>
+              <a:rPr lang="en-US"/>
               <a:t>Click to edit Master title style</a:t>
             </a:r>
-            <a:endParaRPr lang="en-US"/>
           </a:p>
         </p:txBody>
       </p:sp>
@@ -885,38 +939,37 @@
           <a:p>
             <a:pPr lvl="0"/>
             <a:r>
-              <a:rPr lang="en-US" smtClean="0"/>
+              <a:rPr lang="en-US"/>
               <a:t>Click to edit Master text styles</a:t>
             </a:r>
           </a:p>
           <a:p>
             <a:pPr lvl="1"/>
             <a:r>
-              <a:rPr lang="en-US" smtClean="0"/>
+              <a:rPr lang="en-US"/>
               <a:t>Second level</a:t>
             </a:r>
           </a:p>
           <a:p>
             <a:pPr lvl="2"/>
             <a:r>
-              <a:rPr lang="en-US" smtClean="0"/>
+              <a:rPr lang="en-US"/>
               <a:t>Third level</a:t>
             </a:r>
           </a:p>
           <a:p>
             <a:pPr lvl="3"/>
             <a:r>
-              <a:rPr lang="en-US" smtClean="0"/>
+              <a:rPr lang="en-US"/>
               <a:t>Fourth level</a:t>
             </a:r>
           </a:p>
           <a:p>
             <a:pPr lvl="4"/>
             <a:r>
-              <a:rPr lang="en-US" smtClean="0"/>
+              <a:rPr lang="en-US"/>
               <a:t>Fifth level</a:t>
             </a:r>
-            <a:endParaRPr lang="en-US"/>
           </a:p>
         </p:txBody>
       </p:sp>
@@ -937,7 +990,7 @@
           <a:p>
             <a:fld id="{2EF934B8-BC58-45C4-9EB1-8410D920902B}" type="datetime1">
               <a:rPr lang="en-US" smtClean="0"/>
-              <a:t>5/6/2025</a:t>
+              <a:t>6/29/2025</a:t>
             </a:fld>
             <a:endParaRPr lang="en-US"/>
           </a:p>
@@ -959,10 +1012,9 @@
           <a:lstStyle/>
           <a:p>
             <a:r>
-              <a:rPr lang="en-US" smtClean="0"/>
+              <a:rPr lang="en-US"/>
               <a:t>By: Arjun Singh Saud</a:t>
             </a:r>
-            <a:endParaRPr lang="en-US"/>
           </a:p>
         </p:txBody>
       </p:sp>
@@ -1037,10 +1089,9 @@
           <a:lstStyle/>
           <a:p>
             <a:r>
-              <a:rPr lang="en-US" smtClean="0"/>
+              <a:rPr lang="en-US"/>
               <a:t>Click to edit Master title style</a:t>
             </a:r>
-            <a:endParaRPr lang="en-US"/>
           </a:p>
         </p:txBody>
       </p:sp>
@@ -1066,38 +1117,37 @@
           <a:p>
             <a:pPr lvl="0"/>
             <a:r>
-              <a:rPr lang="en-US" smtClean="0"/>
+              <a:rPr lang="en-US"/>
               <a:t>Click to edit Master text styles</a:t>
             </a:r>
           </a:p>
           <a:p>
             <a:pPr lvl="1"/>
             <a:r>
-              <a:rPr lang="en-US" smtClean="0"/>
+              <a:rPr lang="en-US"/>
               <a:t>Second level</a:t>
             </a:r>
           </a:p>
           <a:p>
             <a:pPr lvl="2"/>
             <a:r>
-              <a:rPr lang="en-US" smtClean="0"/>
+              <a:rPr lang="en-US"/>
               <a:t>Third level</a:t>
             </a:r>
           </a:p>
           <a:p>
             <a:pPr lvl="3"/>
             <a:r>
-              <a:rPr lang="en-US" smtClean="0"/>
+              <a:rPr lang="en-US"/>
               <a:t>Fourth level</a:t>
             </a:r>
           </a:p>
           <a:p>
             <a:pPr lvl="4"/>
             <a:r>
-              <a:rPr lang="en-US" smtClean="0"/>
+              <a:rPr lang="en-US"/>
               <a:t>Fifth level</a:t>
             </a:r>
-            <a:endParaRPr lang="en-US"/>
           </a:p>
         </p:txBody>
       </p:sp>
@@ -1118,7 +1168,7 @@
           <a:p>
             <a:fld id="{2D124169-01AD-418C-BB14-982904925B28}" type="datetime1">
               <a:rPr lang="en-US" smtClean="0"/>
-              <a:t>5/6/2025</a:t>
+              <a:t>6/29/2025</a:t>
             </a:fld>
             <a:endParaRPr lang="en-US"/>
           </a:p>
@@ -1140,10 +1190,9 @@
           <a:lstStyle/>
           <a:p>
             <a:r>
-              <a:rPr lang="en-US" smtClean="0"/>
+              <a:rPr lang="en-US"/>
               <a:t>By: Arjun Singh Saud</a:t>
             </a:r>
-            <a:endParaRPr lang="en-US"/>
           </a:p>
         </p:txBody>
       </p:sp>
@@ -1213,10 +1262,9 @@
           <a:lstStyle/>
           <a:p>
             <a:r>
-              <a:rPr lang="en-US" smtClean="0"/>
+              <a:rPr lang="en-US"/>
               <a:t>Click to edit Master title style</a:t>
             </a:r>
-            <a:endParaRPr lang="en-US"/>
           </a:p>
         </p:txBody>
       </p:sp>
@@ -1237,38 +1285,37 @@
           <a:p>
             <a:pPr lvl="0"/>
             <a:r>
-              <a:rPr lang="en-US" smtClean="0"/>
+              <a:rPr lang="en-US"/>
               <a:t>Click to edit Master text styles</a:t>
             </a:r>
           </a:p>
           <a:p>
             <a:pPr lvl="1"/>
             <a:r>
-              <a:rPr lang="en-US" smtClean="0"/>
+              <a:rPr lang="en-US"/>
               <a:t>Second level</a:t>
             </a:r>
           </a:p>
           <a:p>
             <a:pPr lvl="2"/>
             <a:r>
-              <a:rPr lang="en-US" smtClean="0"/>
+              <a:rPr lang="en-US"/>
               <a:t>Third level</a:t>
             </a:r>
           </a:p>
           <a:p>
             <a:pPr lvl="3"/>
             <a:r>
-              <a:rPr lang="en-US" smtClean="0"/>
+              <a:rPr lang="en-US"/>
               <a:t>Fourth level</a:t>
             </a:r>
           </a:p>
           <a:p>
             <a:pPr lvl="4"/>
             <a:r>
-              <a:rPr lang="en-US" smtClean="0"/>
+              <a:rPr lang="en-US"/>
               <a:t>Fifth level</a:t>
             </a:r>
-            <a:endParaRPr lang="en-US"/>
           </a:p>
         </p:txBody>
       </p:sp>
@@ -1289,7 +1336,7 @@
           <a:p>
             <a:fld id="{BF55982D-0643-4695-83E6-9BE687780A3B}" type="datetime1">
               <a:rPr lang="en-US" smtClean="0"/>
-              <a:t>5/6/2025</a:t>
+              <a:t>6/29/2025</a:t>
             </a:fld>
             <a:endParaRPr lang="en-US"/>
           </a:p>
@@ -1311,10 +1358,9 @@
           <a:lstStyle/>
           <a:p>
             <a:r>
-              <a:rPr lang="en-US" smtClean="0"/>
+              <a:rPr lang="en-US"/>
               <a:t>By: Arjun Singh Saud</a:t>
             </a:r>
-            <a:endParaRPr lang="en-US"/>
           </a:p>
         </p:txBody>
       </p:sp>
@@ -1393,10 +1439,9 @@
           </a:lstStyle>
           <a:p>
             <a:r>
-              <a:rPr lang="en-US" smtClean="0"/>
+              <a:rPr lang="en-US"/>
               <a:t>Click to edit Master title style</a:t>
             </a:r>
-            <a:endParaRPr lang="en-US"/>
           </a:p>
         </p:txBody>
       </p:sp>
@@ -1513,7 +1558,7 @@
           <a:p>
             <a:pPr lvl="0"/>
             <a:r>
-              <a:rPr lang="en-US" smtClean="0"/>
+              <a:rPr lang="en-US"/>
               <a:t>Click to edit Master text styles</a:t>
             </a:r>
           </a:p>
@@ -1536,7 +1581,7 @@
           <a:p>
             <a:fld id="{8ADD3D07-98CD-4B67-A34E-47ADB4A5FAD8}" type="datetime1">
               <a:rPr lang="en-US" smtClean="0"/>
-              <a:t>5/6/2025</a:t>
+              <a:t>6/29/2025</a:t>
             </a:fld>
             <a:endParaRPr lang="en-US"/>
           </a:p>
@@ -1558,10 +1603,9 @@
           <a:lstStyle/>
           <a:p>
             <a:r>
-              <a:rPr lang="en-US" smtClean="0"/>
+              <a:rPr lang="en-US"/>
               <a:t>By: Arjun Singh Saud</a:t>
             </a:r>
-            <a:endParaRPr lang="en-US"/>
           </a:p>
         </p:txBody>
       </p:sp>
@@ -1631,10 +1675,9 @@
           <a:lstStyle/>
           <a:p>
             <a:r>
-              <a:rPr lang="en-US" smtClean="0"/>
+              <a:rPr lang="en-US"/>
               <a:t>Click to edit Master title style</a:t>
             </a:r>
-            <a:endParaRPr lang="en-US"/>
           </a:p>
         </p:txBody>
       </p:sp>
@@ -1688,38 +1731,37 @@
           <a:p>
             <a:pPr lvl="0"/>
             <a:r>
-              <a:rPr lang="en-US" smtClean="0"/>
+              <a:rPr lang="en-US"/>
               <a:t>Click to edit Master text styles</a:t>
             </a:r>
           </a:p>
           <a:p>
             <a:pPr lvl="1"/>
             <a:r>
-              <a:rPr lang="en-US" smtClean="0"/>
+              <a:rPr lang="en-US"/>
               <a:t>Second level</a:t>
             </a:r>
           </a:p>
           <a:p>
             <a:pPr lvl="2"/>
             <a:r>
-              <a:rPr lang="en-US" smtClean="0"/>
+              <a:rPr lang="en-US"/>
               <a:t>Third level</a:t>
             </a:r>
           </a:p>
           <a:p>
             <a:pPr lvl="3"/>
             <a:r>
-              <a:rPr lang="en-US" smtClean="0"/>
+              <a:rPr lang="en-US"/>
               <a:t>Fourth level</a:t>
             </a:r>
           </a:p>
           <a:p>
             <a:pPr lvl="4"/>
             <a:r>
-              <a:rPr lang="en-US" smtClean="0"/>
+              <a:rPr lang="en-US"/>
               <a:t>Fifth level</a:t>
             </a:r>
-            <a:endParaRPr lang="en-US"/>
           </a:p>
         </p:txBody>
       </p:sp>
@@ -1773,38 +1815,37 @@
           <a:p>
             <a:pPr lvl="0"/>
             <a:r>
-              <a:rPr lang="en-US" smtClean="0"/>
+              <a:rPr lang="en-US"/>
               <a:t>Click to edit Master text styles</a:t>
             </a:r>
           </a:p>
           <a:p>
             <a:pPr lvl="1"/>
             <a:r>
-              <a:rPr lang="en-US" smtClean="0"/>
+              <a:rPr lang="en-US"/>
               <a:t>Second level</a:t>
             </a:r>
           </a:p>
           <a:p>
             <a:pPr lvl="2"/>
             <a:r>
-              <a:rPr lang="en-US" smtClean="0"/>
+              <a:rPr lang="en-US"/>
               <a:t>Third level</a:t>
             </a:r>
           </a:p>
           <a:p>
             <a:pPr lvl="3"/>
             <a:r>
-              <a:rPr lang="en-US" smtClean="0"/>
+              <a:rPr lang="en-US"/>
               <a:t>Fourth level</a:t>
             </a:r>
           </a:p>
           <a:p>
             <a:pPr lvl="4"/>
             <a:r>
-              <a:rPr lang="en-US" smtClean="0"/>
+              <a:rPr lang="en-US"/>
               <a:t>Fifth level</a:t>
             </a:r>
-            <a:endParaRPr lang="en-US"/>
           </a:p>
         </p:txBody>
       </p:sp>
@@ -1825,7 +1866,7 @@
           <a:p>
             <a:fld id="{5C875C65-16BF-4CB2-B539-9B8E21F3F481}" type="datetime1">
               <a:rPr lang="en-US" smtClean="0"/>
-              <a:t>5/6/2025</a:t>
+              <a:t>6/29/2025</a:t>
             </a:fld>
             <a:endParaRPr lang="en-US"/>
           </a:p>
@@ -1847,10 +1888,9 @@
           <a:lstStyle/>
           <a:p>
             <a:r>
-              <a:rPr lang="en-US" smtClean="0"/>
+              <a:rPr lang="en-US"/>
               <a:t>By: Arjun Singh Saud</a:t>
             </a:r>
-            <a:endParaRPr lang="en-US"/>
           </a:p>
         </p:txBody>
       </p:sp>
@@ -1924,10 +1964,9 @@
           </a:lstStyle>
           <a:p>
             <a:r>
-              <a:rPr lang="en-US" smtClean="0"/>
+              <a:rPr lang="en-US"/>
               <a:t>Click to edit Master title style</a:t>
             </a:r>
-            <a:endParaRPr lang="en-US"/>
           </a:p>
         </p:txBody>
       </p:sp>
@@ -1990,7 +2029,7 @@
           <a:p>
             <a:pPr lvl="0"/>
             <a:r>
-              <a:rPr lang="en-US" smtClean="0"/>
+              <a:rPr lang="en-US"/>
               <a:t>Click to edit Master text styles</a:t>
             </a:r>
           </a:p>
@@ -2046,38 +2085,37 @@
           <a:p>
             <a:pPr lvl="0"/>
             <a:r>
-              <a:rPr lang="en-US" smtClean="0"/>
+              <a:rPr lang="en-US"/>
               <a:t>Click to edit Master text styles</a:t>
             </a:r>
           </a:p>
           <a:p>
             <a:pPr lvl="1"/>
             <a:r>
-              <a:rPr lang="en-US" smtClean="0"/>
+              <a:rPr lang="en-US"/>
               <a:t>Second level</a:t>
             </a:r>
           </a:p>
           <a:p>
             <a:pPr lvl="2"/>
             <a:r>
-              <a:rPr lang="en-US" smtClean="0"/>
+              <a:rPr lang="en-US"/>
               <a:t>Third level</a:t>
             </a:r>
           </a:p>
           <a:p>
             <a:pPr lvl="3"/>
             <a:r>
-              <a:rPr lang="en-US" smtClean="0"/>
+              <a:rPr lang="en-US"/>
               <a:t>Fourth level</a:t>
             </a:r>
           </a:p>
           <a:p>
             <a:pPr lvl="4"/>
             <a:r>
-              <a:rPr lang="en-US" smtClean="0"/>
+              <a:rPr lang="en-US"/>
               <a:t>Fifth level</a:t>
             </a:r>
-            <a:endParaRPr lang="en-US"/>
           </a:p>
         </p:txBody>
       </p:sp>
@@ -2140,7 +2178,7 @@
           <a:p>
             <a:pPr lvl="0"/>
             <a:r>
-              <a:rPr lang="en-US" smtClean="0"/>
+              <a:rPr lang="en-US"/>
               <a:t>Click to edit Master text styles</a:t>
             </a:r>
           </a:p>
@@ -2196,38 +2234,37 @@
           <a:p>
             <a:pPr lvl="0"/>
             <a:r>
-              <a:rPr lang="en-US" smtClean="0"/>
+              <a:rPr lang="en-US"/>
               <a:t>Click to edit Master text styles</a:t>
             </a:r>
           </a:p>
           <a:p>
             <a:pPr lvl="1"/>
             <a:r>
-              <a:rPr lang="en-US" smtClean="0"/>
+              <a:rPr lang="en-US"/>
               <a:t>Second level</a:t>
             </a:r>
           </a:p>
           <a:p>
             <a:pPr lvl="2"/>
             <a:r>
-              <a:rPr lang="en-US" smtClean="0"/>
+              <a:rPr lang="en-US"/>
               <a:t>Third level</a:t>
             </a:r>
           </a:p>
           <a:p>
             <a:pPr lvl="3"/>
             <a:r>
-              <a:rPr lang="en-US" smtClean="0"/>
+              <a:rPr lang="en-US"/>
               <a:t>Fourth level</a:t>
             </a:r>
           </a:p>
           <a:p>
             <a:pPr lvl="4"/>
             <a:r>
-              <a:rPr lang="en-US" smtClean="0"/>
+              <a:rPr lang="en-US"/>
               <a:t>Fifth level</a:t>
             </a:r>
-            <a:endParaRPr lang="en-US"/>
           </a:p>
         </p:txBody>
       </p:sp>
@@ -2248,7 +2285,7 @@
           <a:p>
             <a:fld id="{D039FE52-3D39-4273-BFF1-A803E6F6551D}" type="datetime1">
               <a:rPr lang="en-US" smtClean="0"/>
-              <a:t>5/6/2025</a:t>
+              <a:t>6/29/2025</a:t>
             </a:fld>
             <a:endParaRPr lang="en-US"/>
           </a:p>
@@ -2270,10 +2307,9 @@
           <a:lstStyle/>
           <a:p>
             <a:r>
-              <a:rPr lang="en-US" smtClean="0"/>
+              <a:rPr lang="en-US"/>
               <a:t>By: Arjun Singh Saud</a:t>
             </a:r>
-            <a:endParaRPr lang="en-US"/>
           </a:p>
         </p:txBody>
       </p:sp>
@@ -2343,10 +2379,9 @@
           <a:lstStyle/>
           <a:p>
             <a:r>
-              <a:rPr lang="en-US" smtClean="0"/>
+              <a:rPr lang="en-US"/>
               <a:t>Click to edit Master title style</a:t>
             </a:r>
-            <a:endParaRPr lang="en-US"/>
           </a:p>
         </p:txBody>
       </p:sp>
@@ -2367,7 +2402,7 @@
           <a:p>
             <a:fld id="{271D7585-FC12-4453-94A4-53D5E06FFBF4}" type="datetime1">
               <a:rPr lang="en-US" smtClean="0"/>
-              <a:t>5/6/2025</a:t>
+              <a:t>6/29/2025</a:t>
             </a:fld>
             <a:endParaRPr lang="en-US"/>
           </a:p>
@@ -2389,10 +2424,9 @@
           <a:lstStyle/>
           <a:p>
             <a:r>
-              <a:rPr lang="en-US" smtClean="0"/>
+              <a:rPr lang="en-US"/>
               <a:t>By: Arjun Singh Saud</a:t>
             </a:r>
-            <a:endParaRPr lang="en-US"/>
           </a:p>
         </p:txBody>
       </p:sp>
@@ -2463,7 +2497,7 @@
           <a:p>
             <a:fld id="{6AA262D7-08F3-4CFB-89E5-10B3951DE747}" type="datetime1">
               <a:rPr lang="en-US" smtClean="0"/>
-              <a:t>5/6/2025</a:t>
+              <a:t>6/29/2025</a:t>
             </a:fld>
             <a:endParaRPr lang="en-US"/>
           </a:p>
@@ -2485,10 +2519,9 @@
           <a:lstStyle/>
           <a:p>
             <a:r>
-              <a:rPr lang="en-US" smtClean="0"/>
+              <a:rPr lang="en-US"/>
               <a:t>By: Arjun Singh Saud</a:t>
             </a:r>
-            <a:endParaRPr lang="en-US"/>
           </a:p>
         </p:txBody>
       </p:sp>
@@ -2567,10 +2600,9 @@
           </a:lstStyle>
           <a:p>
             <a:r>
-              <a:rPr lang="en-US" smtClean="0"/>
+              <a:rPr lang="en-US"/>
               <a:t>Click to edit Master title style</a:t>
             </a:r>
-            <a:endParaRPr lang="en-US"/>
           </a:p>
         </p:txBody>
       </p:sp>
@@ -2624,38 +2656,37 @@
           <a:p>
             <a:pPr lvl="0"/>
             <a:r>
-              <a:rPr lang="en-US" smtClean="0"/>
+              <a:rPr lang="en-US"/>
               <a:t>Click to edit Master text styles</a:t>
             </a:r>
           </a:p>
           <a:p>
             <a:pPr lvl="1"/>
             <a:r>
-              <a:rPr lang="en-US" smtClean="0"/>
+              <a:rPr lang="en-US"/>
               <a:t>Second level</a:t>
             </a:r>
           </a:p>
           <a:p>
             <a:pPr lvl="2"/>
             <a:r>
-              <a:rPr lang="en-US" smtClean="0"/>
+              <a:rPr lang="en-US"/>
               <a:t>Third level</a:t>
             </a:r>
           </a:p>
           <a:p>
             <a:pPr lvl="3"/>
             <a:r>
-              <a:rPr lang="en-US" smtClean="0"/>
+              <a:rPr lang="en-US"/>
               <a:t>Fourth level</a:t>
             </a:r>
           </a:p>
           <a:p>
             <a:pPr lvl="4"/>
             <a:r>
-              <a:rPr lang="en-US" smtClean="0"/>
+              <a:rPr lang="en-US"/>
               <a:t>Fifth level</a:t>
             </a:r>
-            <a:endParaRPr lang="en-US"/>
           </a:p>
         </p:txBody>
       </p:sp>
@@ -2718,7 +2749,7 @@
           <a:p>
             <a:pPr lvl="0"/>
             <a:r>
-              <a:rPr lang="en-US" smtClean="0"/>
+              <a:rPr lang="en-US"/>
               <a:t>Click to edit Master text styles</a:t>
             </a:r>
           </a:p>
@@ -2741,7 +2772,7 @@
           <a:p>
             <a:fld id="{746FD879-354F-4094-BCAC-0E10621198A6}" type="datetime1">
               <a:rPr lang="en-US" smtClean="0"/>
-              <a:t>5/6/2025</a:t>
+              <a:t>6/29/2025</a:t>
             </a:fld>
             <a:endParaRPr lang="en-US"/>
           </a:p>
@@ -2763,10 +2794,9 @@
           <a:lstStyle/>
           <a:p>
             <a:r>
-              <a:rPr lang="en-US" smtClean="0"/>
+              <a:rPr lang="en-US"/>
               <a:t>By: Arjun Singh Saud</a:t>
             </a:r>
-            <a:endParaRPr lang="en-US"/>
           </a:p>
         </p:txBody>
       </p:sp>
@@ -2845,10 +2875,9 @@
           </a:lstStyle>
           <a:p>
             <a:r>
-              <a:rPr lang="en-US" smtClean="0"/>
+              <a:rPr lang="en-US"/>
               <a:t>Click to edit Master title style</a:t>
             </a:r>
-            <a:endParaRPr lang="en-US"/>
           </a:p>
         </p:txBody>
       </p:sp>
@@ -2972,7 +3001,7 @@
           <a:p>
             <a:pPr lvl="0"/>
             <a:r>
-              <a:rPr lang="en-US" smtClean="0"/>
+              <a:rPr lang="en-US"/>
               <a:t>Click to edit Master text styles</a:t>
             </a:r>
           </a:p>
@@ -2995,7 +3024,7 @@
           <a:p>
             <a:fld id="{E0137244-65CC-4DE0-9B1B-227C5819EC26}" type="datetime1">
               <a:rPr lang="en-US" smtClean="0"/>
-              <a:t>5/6/2025</a:t>
+              <a:t>6/29/2025</a:t>
             </a:fld>
             <a:endParaRPr lang="en-US"/>
           </a:p>
@@ -3017,10 +3046,9 @@
           <a:lstStyle/>
           <a:p>
             <a:r>
-              <a:rPr lang="en-US" smtClean="0"/>
+              <a:rPr lang="en-US"/>
               <a:t>By: Arjun Singh Saud</a:t>
             </a:r>
-            <a:endParaRPr lang="en-US"/>
           </a:p>
         </p:txBody>
       </p:sp>
@@ -3105,10 +3133,9 @@
           <a:lstStyle/>
           <a:p>
             <a:r>
-              <a:rPr lang="en-US" smtClean="0"/>
+              <a:rPr lang="en-US"/>
               <a:t>Click to edit Master title style</a:t>
             </a:r>
-            <a:endParaRPr lang="en-US"/>
           </a:p>
         </p:txBody>
       </p:sp>
@@ -3139,38 +3166,37 @@
           <a:p>
             <a:pPr lvl="0"/>
             <a:r>
-              <a:rPr lang="en-US" smtClean="0"/>
+              <a:rPr lang="en-US"/>
               <a:t>Click to edit Master text styles</a:t>
             </a:r>
           </a:p>
           <a:p>
             <a:pPr lvl="1"/>
             <a:r>
-              <a:rPr lang="en-US" smtClean="0"/>
+              <a:rPr lang="en-US"/>
               <a:t>Second level</a:t>
             </a:r>
           </a:p>
           <a:p>
             <a:pPr lvl="2"/>
             <a:r>
-              <a:rPr lang="en-US" smtClean="0"/>
+              <a:rPr lang="en-US"/>
               <a:t>Third level</a:t>
             </a:r>
           </a:p>
           <a:p>
             <a:pPr lvl="3"/>
             <a:r>
-              <a:rPr lang="en-US" smtClean="0"/>
+              <a:rPr lang="en-US"/>
               <a:t>Fourth level</a:t>
             </a:r>
           </a:p>
           <a:p>
             <a:pPr lvl="4"/>
             <a:r>
-              <a:rPr lang="en-US" smtClean="0"/>
+              <a:rPr lang="en-US"/>
               <a:t>Fifth level</a:t>
             </a:r>
-            <a:endParaRPr lang="en-US"/>
           </a:p>
         </p:txBody>
       </p:sp>
@@ -3209,7 +3235,7 @@
           <a:p>
             <a:fld id="{5286E578-74D6-4F9E-8E3E-882BCE3C0FDD}" type="datetime1">
               <a:rPr lang="en-US" smtClean="0"/>
-              <a:t>5/6/2025</a:t>
+              <a:t>6/29/2025</a:t>
             </a:fld>
             <a:endParaRPr lang="en-US"/>
           </a:p>
@@ -3249,10 +3275,9 @@
           </a:lstStyle>
           <a:p>
             <a:r>
-              <a:rPr lang="en-US" smtClean="0"/>
+              <a:rPr lang="en-US"/>
               <a:t>By: Arjun Singh Saud</a:t>
             </a:r>
-            <a:endParaRPr lang="en-US"/>
           </a:p>
         </p:txBody>
       </p:sp>
@@ -3606,7 +3631,7 @@
             <a:pPr algn="ctr">
               <a:buNone/>
             </a:pPr>
-            <a:endParaRPr lang="en-US" sz="4200" b="1" dirty="0" smtClean="0">
+            <a:endParaRPr lang="en-US" sz="4200" b="1" dirty="0">
               <a:latin typeface="Book Antiqua" pitchFamily="18" charset="0"/>
             </a:endParaRPr>
           </a:p>
@@ -3615,27 +3640,24 @@
               <a:buNone/>
             </a:pPr>
             <a:r>
-              <a:rPr lang="en-US" sz="4200" b="1" dirty="0" smtClean="0">
+              <a:rPr lang="en-US" sz="4200" b="1" dirty="0">
                 <a:latin typeface="Book Antiqua" pitchFamily="18" charset="0"/>
               </a:rPr>
               <a:t>Unit</a:t>
             </a:r>
             <a:r>
-              <a:rPr lang="en-US" sz="4400" b="1" dirty="0" smtClean="0">
+              <a:rPr lang="en-US" sz="4400" b="1" dirty="0">
                 <a:latin typeface="Book Antiqua" pitchFamily="18" charset="0"/>
               </a:rPr>
               <a:t>-2</a:t>
             </a:r>
-            <a:endParaRPr lang="en-US" sz="4400" b="1" dirty="0">
-              <a:latin typeface="Book Antiqua" pitchFamily="18" charset="0"/>
-            </a:endParaRPr>
           </a:p>
           <a:p>
             <a:pPr algn="ctr">
               <a:buNone/>
             </a:pPr>
             <a:r>
-              <a:rPr lang="en-US" sz="4200" b="1" u="sng" dirty="0" smtClean="0">
+              <a:rPr lang="en-US" sz="4200" b="1" u="sng" dirty="0">
                 <a:latin typeface="Book Antiqua" pitchFamily="18" charset="0"/>
               </a:rPr>
               <a:t>Linear Models for Regression and Classification</a:t>
@@ -3649,13 +3671,7 @@
               <a:rPr lang="en-US" sz="4200" b="1" dirty="0">
                 <a:latin typeface="Book Antiqua" pitchFamily="18" charset="0"/>
               </a:rPr>
-              <a:t>	</a:t>
-            </a:r>
-            <a:r>
-              <a:rPr lang="en-US" sz="4200" b="1" dirty="0" smtClean="0">
-                <a:latin typeface="Book Antiqua" pitchFamily="18" charset="0"/>
-              </a:rPr>
-              <a:t>					   		</a:t>
+              <a:t>						   		</a:t>
             </a:r>
             <a:endParaRPr lang="en-US" b="1" dirty="0">
               <a:latin typeface="Book Antiqua" pitchFamily="18" charset="0"/>
@@ -3680,7 +3696,7 @@
           <a:p>
             <a:fld id="{A1DB7DF2-F439-4098-8F51-12F176ADA032}" type="datetime1">
               <a:rPr lang="en-US" smtClean="0"/>
-              <a:t>5/6/2025</a:t>
+              <a:t>6/29/2025</a:t>
             </a:fld>
             <a:endParaRPr lang="en-US"/>
           </a:p>
@@ -3702,10 +3718,9 @@
           <a:lstStyle/>
           <a:p>
             <a:r>
-              <a:rPr lang="en-US" smtClean="0"/>
+              <a:rPr lang="en-US"/>
               <a:t>By: Arjun Singh Saud</a:t>
             </a:r>
-            <a:endParaRPr lang="en-US"/>
           </a:p>
         </p:txBody>
       </p:sp>
@@ -3739,13 +3754,6 @@
     <a:masterClrMapping/>
   </p:clrMapOvr>
   <p:transition/>
-  <p:timing>
-    <p:tnLst>
-      <p:par>
-        <p:cTn id="1" dur="indefinite" restart="never" nodeType="tmRoot"/>
-      </p:par>
-    </p:tnLst>
-  </p:timing>
 </p:sld>
 </file>
 
@@ -3785,7 +3793,7 @@
           <a:p>
             <a:pPr eaLnBrk="1" hangingPunct="1"/>
             <a:r>
-              <a:rPr lang="en-US" altLang="en-US" sz="3600" b="1" dirty="0" smtClean="0">
+              <a:rPr lang="en-US" altLang="en-US" sz="3600" b="1" dirty="0">
                 <a:latin typeface="Book Antiqua" pitchFamily="18" charset="0"/>
               </a:rPr>
               <a:t>Logistic Regression</a:t>
@@ -3817,7 +3825,7 @@
           <a:p>
             <a:pPr algn="just" fontAlgn="base"/>
             <a:r>
-              <a:rPr lang="en-US" sz="2800" dirty="0" smtClean="0">
+              <a:rPr lang="en-US" sz="2800" dirty="0">
                 <a:latin typeface="Book Antiqua" pitchFamily="18" charset="0"/>
               </a:rPr>
               <a:t>Unlike linear regression, the output is transformed into a probability using the logistic function:</a:t>
@@ -3828,14 +3836,14 @@
               <a:buNone/>
             </a:pPr>
             <a:r>
-              <a:rPr lang="en-US" sz="2800" dirty="0" smtClean="0"/>
+              <a:rPr lang="en-US" sz="2800" dirty="0"/>
               <a:t>	</a:t>
             </a:r>
           </a:p>
           <a:p>
             <a:pPr marL="284163" indent="-284163" algn="just"/>
             <a:r>
-              <a:rPr lang="en-US" sz="2800" dirty="0" smtClean="0">
+              <a:rPr lang="en-US" sz="2800" dirty="0">
                 <a:latin typeface="Book Antiqua" pitchFamily="18" charset="0"/>
               </a:rPr>
               <a:t>If the probability is &gt; 0.5 we can take the output as a prediction for the class 1, otherwise the prediction is for the class 0.</a:t>
@@ -3844,43 +3852,43 @@
           <a:p>
             <a:pPr marL="284163" indent="-284163" algn="just"/>
             <a:r>
-              <a:rPr lang="en-US" sz="2800" dirty="0" smtClean="0">
+              <a:rPr lang="en-US" sz="2800" dirty="0">
                 <a:latin typeface="Book Antiqua" pitchFamily="18" charset="0"/>
               </a:rPr>
               <a:t>The job of the learning algorithm will be to discover the best values for the coefficients (w</a:t>
             </a:r>
             <a:r>
-              <a:rPr lang="en-US" sz="2800" baseline="-25000" dirty="0" smtClean="0">
+              <a:rPr lang="en-US" sz="2800" baseline="-25000" dirty="0">
                 <a:latin typeface="Book Antiqua" pitchFamily="18" charset="0"/>
               </a:rPr>
               <a:t>0</a:t>
             </a:r>
             <a:r>
-              <a:rPr lang="en-US" sz="2800" dirty="0" smtClean="0">
+              <a:rPr lang="en-US" sz="2800" dirty="0">
                 <a:latin typeface="Book Antiqua" pitchFamily="18" charset="0"/>
               </a:rPr>
               <a:t>,  w</a:t>
             </a:r>
             <a:r>
-              <a:rPr lang="en-US" sz="2800" baseline="-25000" dirty="0" smtClean="0">
+              <a:rPr lang="en-US" sz="2800" baseline="-25000" dirty="0">
                 <a:latin typeface="Book Antiqua" pitchFamily="18" charset="0"/>
               </a:rPr>
               <a:t>1</a:t>
             </a:r>
             <a:r>
-              <a:rPr lang="en-US" sz="2800" dirty="0" smtClean="0">
+              <a:rPr lang="en-US" sz="2800" dirty="0">
                 <a:latin typeface="Book Antiqua" pitchFamily="18" charset="0"/>
               </a:rPr>
               <a:t>, and w</a:t>
             </a:r>
             <a:r>
-              <a:rPr lang="en-US" sz="2800" baseline="-25000" dirty="0" smtClean="0">
+              <a:rPr lang="en-US" sz="2800" baseline="-25000" dirty="0">
                 <a:latin typeface="Book Antiqua" pitchFamily="18" charset="0"/>
               </a:rPr>
               <a:t>2</a:t>
             </a:r>
             <a:r>
-              <a:rPr lang="en-US" sz="2800" dirty="0" smtClean="0">
+              <a:rPr lang="en-US" sz="2800" dirty="0">
                 <a:latin typeface="Book Antiqua" pitchFamily="18" charset="0"/>
               </a:rPr>
               <a:t>) based on the training data.</a:t>
@@ -3888,7 +3896,7 @@
           </a:p>
           <a:p>
             <a:pPr marL="284163" indent="-284163" algn="just"/>
-            <a:endParaRPr lang="en-US" sz="2800" dirty="0" smtClean="0">
+            <a:endParaRPr lang="en-US" sz="2800" dirty="0">
               <a:latin typeface="Book Antiqua" pitchFamily="18" charset="0"/>
             </a:endParaRPr>
           </a:p>
@@ -4137,23 +4145,23 @@
           <a:graphicData uri="http://schemas.openxmlformats.org/presentationml/2006/ole">
             <mc:AlternateContent xmlns:mc="http://schemas.openxmlformats.org/markup-compatibility/2006">
               <mc:Choice xmlns:v="urn:schemas-microsoft-com:vml" Requires="v">
-                <p:oleObj spid="_x0000_s3108" name="Equation" r:id="rId3" imgW="1143000" imgH="393480" progId="Equation.3">
+                <p:oleObj name="Equation" r:id="rId2" imgW="1143000" imgH="393480" progId="Equation.3">
                   <p:embed/>
                 </p:oleObj>
               </mc:Choice>
               <mc:Fallback>
-                <p:oleObj name="Equation" r:id="rId3" imgW="1143000" imgH="393480" progId="Equation.3">
+                <p:oleObj name="Equation" r:id="rId2" imgW="1143000" imgH="393480" progId="Equation.3">
                   <p:embed/>
                   <p:pic>
                     <p:nvPicPr>
-                      <p:cNvPr id="0" name=""/>
+                      <p:cNvPr id="43014" name="Object 6"/>
                       <p:cNvPicPr>
                         <a:picLocks noChangeAspect="1" noChangeArrowheads="1"/>
                       </p:cNvPicPr>
                       <p:nvPr/>
                     </p:nvPicPr>
                     <p:blipFill>
-                      <a:blip r:embed="rId4"/>
+                      <a:blip r:embed="rId3"/>
                       <a:srcRect/>
                       <a:stretch>
                         <a:fillRect/>
@@ -4202,7 +4210,7 @@
           <a:p>
             <a:fld id="{288C0AA5-B421-405B-8D22-3EE9083A3010}" type="datetime1">
               <a:rPr lang="en-US" smtClean="0"/>
-              <a:t>5/6/2025</a:t>
+              <a:t>6/29/2025</a:t>
             </a:fld>
             <a:endParaRPr lang="en-US"/>
           </a:p>
@@ -4224,7 +4232,7 @@
           <a:lstStyle/>
           <a:p>
             <a:r>
-              <a:rPr lang="en-US" smtClean="0"/>
+              <a:rPr lang="en-US"/>
               <a:t>By: Arjun Singh Saud</a:t>
             </a:r>
             <a:endParaRPr lang="en-US" dirty="0"/>
@@ -4242,13 +4250,6 @@
     <a:masterClrMapping/>
   </p:clrMapOvr>
   <p:transition/>
-  <p:timing>
-    <p:tnLst>
-      <p:par>
-        <p:cTn id="1" dur="indefinite" restart="never" nodeType="tmRoot"/>
-      </p:par>
-    </p:tnLst>
-  </p:timing>
 </p:sld>
 </file>
 
@@ -4288,7 +4289,7 @@
           <a:p>
             <a:pPr eaLnBrk="1" hangingPunct="1"/>
             <a:r>
-              <a:rPr lang="en-US" altLang="en-US" sz="3600" b="1" dirty="0" smtClean="0">
+              <a:rPr lang="en-US" altLang="en-US" sz="3600" b="1" dirty="0">
                 <a:latin typeface="Book Antiqua" pitchFamily="18" charset="0"/>
               </a:rPr>
               <a:t>Logistic Regression Cost Function</a:t>
@@ -4320,7 +4321,7 @@
           <a:p>
             <a:pPr marL="284163" indent="-284163" algn="just"/>
             <a:r>
-              <a:rPr lang="en-US" sz="2800" dirty="0" smtClean="0">
+              <a:rPr lang="en-US" sz="2800" dirty="0">
                 <a:latin typeface="Book Antiqua" pitchFamily="18" charset="0"/>
               </a:rPr>
               <a:t>Unfortunately we can’t use the cost function MSE in logistic regression. It’s because our prediction function is non-linear (due to sigmoid transform). </a:t>
@@ -4329,14 +4330,11 @@
           <a:p>
             <a:pPr marL="284163" indent="-284163" algn="just"/>
             <a:r>
-              <a:rPr lang="en-US" sz="2800" dirty="0" smtClean="0">
+              <a:rPr lang="en-US" sz="2800" dirty="0">
                 <a:latin typeface="Book Antiqua" pitchFamily="18" charset="0"/>
               </a:rPr>
               <a:t>Squaring this prediction as we do in MSE results in a non-convex function with many local minimums. If our cost function has many local minimums, gradient descent may not find the optimal global minimum.</a:t>
             </a:r>
-            <a:endParaRPr lang="en-US" sz="2800" dirty="0">
-              <a:latin typeface="Book Antiqua" pitchFamily="18" charset="0"/>
-            </a:endParaRPr>
           </a:p>
         </p:txBody>
       </p:sp>
@@ -4572,7 +4570,7 @@
           <a:p>
             <a:fld id="{5AA20271-96E5-4AC4-BD32-212DC9C2C9C2}" type="datetime1">
               <a:rPr lang="en-US" smtClean="0"/>
-              <a:t>5/6/2025</a:t>
+              <a:t>6/29/2025</a:t>
             </a:fld>
             <a:endParaRPr lang="en-US"/>
           </a:p>
@@ -4594,7 +4592,7 @@
           <a:lstStyle/>
           <a:p>
             <a:r>
-              <a:rPr lang="en-US" smtClean="0"/>
+              <a:rPr lang="en-US"/>
               <a:t>By: Arjun Singh Saud</a:t>
             </a:r>
             <a:endParaRPr lang="en-US" dirty="0"/>
@@ -4636,13 +4634,6 @@
     <a:masterClrMapping/>
   </p:clrMapOvr>
   <p:transition/>
-  <p:timing>
-    <p:tnLst>
-      <p:par>
-        <p:cTn id="1" dur="indefinite" restart="never" nodeType="tmRoot"/>
-      </p:par>
-    </p:tnLst>
-  </p:timing>
 </p:sld>
 </file>
 
@@ -4682,7 +4673,7 @@
           <a:p>
             <a:pPr eaLnBrk="1" hangingPunct="1"/>
             <a:r>
-              <a:rPr lang="en-US" altLang="en-US" sz="3600" b="1" dirty="0" smtClean="0">
+              <a:rPr lang="en-US" altLang="en-US" sz="3600" b="1" dirty="0">
                 <a:latin typeface="Book Antiqua" pitchFamily="18" charset="0"/>
               </a:rPr>
               <a:t>Logistic Regression Cost Function</a:t>
@@ -4714,7 +4705,7 @@
           <a:p>
             <a:pPr marL="284163" indent="-284163" algn="just"/>
             <a:r>
-              <a:rPr lang="en-US" sz="2800" dirty="0" smtClean="0">
+              <a:rPr lang="en-US" sz="2800" dirty="0">
                 <a:latin typeface="Book Antiqua" pitchFamily="18" charset="0"/>
               </a:rPr>
               <a:t>Given the training set</a:t>
@@ -4725,7 +4716,7 @@
               <a:buNone/>
             </a:pPr>
             <a:r>
-              <a:rPr lang="en-US" sz="2800" dirty="0" smtClean="0">
+              <a:rPr lang="en-US" sz="2800" dirty="0">
                 <a:latin typeface="Book Antiqua" pitchFamily="18" charset="0"/>
               </a:rPr>
               <a:t>	we want </a:t>
@@ -4734,7 +4725,7 @@
           <a:p>
             <a:pPr marL="284163" indent="-284163" algn="just"/>
             <a:r>
-              <a:rPr lang="en-US" sz="2800" dirty="0" smtClean="0">
+              <a:rPr lang="en-US" sz="2800" dirty="0">
                 <a:latin typeface="Book Antiqua" pitchFamily="18" charset="0"/>
               </a:rPr>
               <a:t>For logistic regression, we use following loss function or error function</a:t>
@@ -4742,27 +4733,24 @@
           </a:p>
           <a:p>
             <a:pPr marL="284163" indent="-284163" algn="just"/>
-            <a:endParaRPr lang="en-US" sz="2800" dirty="0" smtClean="0">
+            <a:endParaRPr lang="en-US" sz="2800" dirty="0">
               <a:latin typeface="Book Antiqua" pitchFamily="18" charset="0"/>
             </a:endParaRPr>
           </a:p>
           <a:p>
             <a:pPr marL="284163" indent="-284163" algn="just"/>
-            <a:endParaRPr lang="en-US" sz="2800" dirty="0" smtClean="0">
+            <a:endParaRPr lang="en-US" sz="2800" dirty="0">
               <a:latin typeface="Book Antiqua" pitchFamily="18" charset="0"/>
             </a:endParaRPr>
           </a:p>
           <a:p>
             <a:pPr marL="284163" indent="-284163" algn="just"/>
             <a:r>
-              <a:rPr lang="en-US" sz="2800" dirty="0" smtClean="0">
+              <a:rPr lang="en-US" sz="2800" dirty="0">
                 <a:latin typeface="Book Antiqua" pitchFamily="18" charset="0"/>
               </a:rPr>
               <a:t>In case y=1, the output (the cost to pay) approaches to 0 as    approaches to 1. Conversely, the cost to pay grows to infinity as    approaches to 0. </a:t>
             </a:r>
-            <a:endParaRPr lang="en-US" sz="2800" dirty="0">
-              <a:latin typeface="Book Antiqua" pitchFamily="18" charset="0"/>
-            </a:endParaRPr>
           </a:p>
         </p:txBody>
       </p:sp>
@@ -5035,23 +5023,23 @@
           <a:graphicData uri="http://schemas.openxmlformats.org/presentationml/2006/ole">
             <mc:AlternateContent xmlns:mc="http://schemas.openxmlformats.org/markup-compatibility/2006">
               <mc:Choice xmlns:v="urn:schemas-microsoft-com:vml" Requires="v">
-                <p:oleObj spid="_x0000_s4263" name="Equation" r:id="rId3" imgW="2743200" imgH="228600" progId="Equation.3">
+                <p:oleObj name="Equation" r:id="rId2" imgW="2743200" imgH="228600" progId="Equation.3">
                   <p:embed/>
                 </p:oleObj>
               </mc:Choice>
               <mc:Fallback>
-                <p:oleObj name="Equation" r:id="rId3" imgW="2743200" imgH="228600" progId="Equation.3">
+                <p:oleObj name="Equation" r:id="rId2" imgW="2743200" imgH="228600" progId="Equation.3">
                   <p:embed/>
                   <p:pic>
                     <p:nvPicPr>
-                      <p:cNvPr id="0" name=""/>
+                      <p:cNvPr id="46081" name="Object 1"/>
                       <p:cNvPicPr>
                         <a:picLocks noChangeAspect="1" noChangeArrowheads="1"/>
                       </p:cNvPicPr>
                       <p:nvPr/>
                     </p:nvPicPr>
                     <p:blipFill>
-                      <a:blip r:embed="rId4">
+                      <a:blip r:embed="rId3">
                         <a:extLst>
                           <a:ext uri="{28A0092B-C50C-407E-A947-70E740481C1C}">
                             <a14:useLocalDpi xmlns:a14="http://schemas.microsoft.com/office/drawing/2010/main" val="0"/>
@@ -5143,23 +5131,23 @@
           <a:graphicData uri="http://schemas.openxmlformats.org/presentationml/2006/ole">
             <mc:AlternateContent xmlns:mc="http://schemas.openxmlformats.org/markup-compatibility/2006">
               <mc:Choice xmlns:v="urn:schemas-microsoft-com:vml" Requires="v">
-                <p:oleObj spid="_x0000_s4264" name="Equation" r:id="rId5" imgW="622030" imgH="228501" progId="Equation.3">
+                <p:oleObj name="Equation" r:id="rId4" imgW="622030" imgH="228501" progId="Equation.3">
                   <p:embed/>
                 </p:oleObj>
               </mc:Choice>
               <mc:Fallback>
-                <p:oleObj name="Equation" r:id="rId5" imgW="622030" imgH="228501" progId="Equation.3">
+                <p:oleObj name="Equation" r:id="rId4" imgW="622030" imgH="228501" progId="Equation.3">
                   <p:embed/>
                   <p:pic>
                     <p:nvPicPr>
-                      <p:cNvPr id="0" name=""/>
+                      <p:cNvPr id="46083" name="Object 3"/>
                       <p:cNvPicPr>
                         <a:picLocks noChangeAspect="1" noChangeArrowheads="1"/>
                       </p:cNvPicPr>
                       <p:nvPr/>
                     </p:nvPicPr>
                     <p:blipFill>
-                      <a:blip r:embed="rId6">
+                      <a:blip r:embed="rId5">
                         <a:extLst>
                           <a:ext uri="{28A0092B-C50C-407E-A947-70E740481C1C}">
                             <a14:useLocalDpi xmlns:a14="http://schemas.microsoft.com/office/drawing/2010/main" val="0"/>
@@ -5251,23 +5239,23 @@
           <a:graphicData uri="http://schemas.openxmlformats.org/presentationml/2006/ole">
             <mc:AlternateContent xmlns:mc="http://schemas.openxmlformats.org/markup-compatibility/2006">
               <mc:Choice xmlns:v="urn:schemas-microsoft-com:vml" Requires="v">
-                <p:oleObj spid="_x0000_s4265" name="Equation" r:id="rId7" imgW="2247840" imgH="457200" progId="Equation.3">
+                <p:oleObj name="Equation" r:id="rId6" imgW="2247840" imgH="457200" progId="Equation.3">
                   <p:embed/>
                 </p:oleObj>
               </mc:Choice>
               <mc:Fallback>
-                <p:oleObj name="Equation" r:id="rId7" imgW="2247840" imgH="457200" progId="Equation.3">
+                <p:oleObj name="Equation" r:id="rId6" imgW="2247840" imgH="457200" progId="Equation.3">
                   <p:embed/>
                   <p:pic>
                     <p:nvPicPr>
-                      <p:cNvPr id="0" name=""/>
+                      <p:cNvPr id="46085" name="Object 5"/>
                       <p:cNvPicPr>
                         <a:picLocks noChangeAspect="1" noChangeArrowheads="1"/>
                       </p:cNvPicPr>
                       <p:nvPr/>
                     </p:nvPicPr>
                     <p:blipFill>
-                      <a:blip r:embed="rId8">
+                      <a:blip r:embed="rId7">
                         <a:extLst>
                           <a:ext uri="{28A0092B-C50C-407E-A947-70E740481C1C}">
                             <a14:useLocalDpi xmlns:a14="http://schemas.microsoft.com/office/drawing/2010/main" val="0"/>
@@ -5321,23 +5309,23 @@
           <a:graphicData uri="http://schemas.openxmlformats.org/presentationml/2006/ole">
             <mc:AlternateContent xmlns:mc="http://schemas.openxmlformats.org/markup-compatibility/2006">
               <mc:Choice xmlns:v="urn:schemas-microsoft-com:vml" Requires="v">
-                <p:oleObj spid="_x0000_s4266" name="Equation" r:id="rId9" imgW="139680" imgH="203040" progId="Equation.3">
+                <p:oleObj name="Equation" r:id="rId8" imgW="139680" imgH="203040" progId="Equation.3">
                   <p:embed/>
                 </p:oleObj>
               </mc:Choice>
               <mc:Fallback>
-                <p:oleObj name="Equation" r:id="rId9" imgW="139680" imgH="203040" progId="Equation.3">
+                <p:oleObj name="Equation" r:id="rId8" imgW="139680" imgH="203040" progId="Equation.3">
                   <p:embed/>
                   <p:pic>
                     <p:nvPicPr>
-                      <p:cNvPr id="0" name=""/>
+                      <p:cNvPr id="46087" name="Object 7"/>
                       <p:cNvPicPr>
                         <a:picLocks noChangeAspect="1" noChangeArrowheads="1"/>
                       </p:cNvPicPr>
                       <p:nvPr/>
                     </p:nvPicPr>
                     <p:blipFill>
-                      <a:blip r:embed="rId10">
+                      <a:blip r:embed="rId9">
                         <a:extLst>
                           <a:ext uri="{28A0092B-C50C-407E-A947-70E740481C1C}">
                             <a14:useLocalDpi xmlns:a14="http://schemas.microsoft.com/office/drawing/2010/main" val="0"/>
@@ -5414,23 +5402,23 @@
           <a:graphicData uri="http://schemas.openxmlformats.org/presentationml/2006/ole">
             <mc:AlternateContent xmlns:mc="http://schemas.openxmlformats.org/markup-compatibility/2006">
               <mc:Choice xmlns:v="urn:schemas-microsoft-com:vml" Requires="v">
-                <p:oleObj spid="_x0000_s4267" name="Equation" r:id="rId11" imgW="139680" imgH="203040" progId="Equation.3">
+                <p:oleObj name="Equation" r:id="rId8" imgW="139680" imgH="203040" progId="Equation.3">
                   <p:embed/>
                 </p:oleObj>
               </mc:Choice>
               <mc:Fallback>
-                <p:oleObj name="Equation" r:id="rId11" imgW="139680" imgH="203040" progId="Equation.3">
+                <p:oleObj name="Equation" r:id="rId8" imgW="139680" imgH="203040" progId="Equation.3">
                   <p:embed/>
                   <p:pic>
                     <p:nvPicPr>
-                      <p:cNvPr id="0" name=""/>
+                      <p:cNvPr id="46088" name="Object 8"/>
                       <p:cNvPicPr>
                         <a:picLocks noChangeAspect="1" noChangeArrowheads="1"/>
                       </p:cNvPicPr>
                       <p:nvPr/>
                     </p:nvPicPr>
                     <p:blipFill>
-                      <a:blip r:embed="rId10">
+                      <a:blip r:embed="rId9">
                         <a:extLst>
                           <a:ext uri="{28A0092B-C50C-407E-A947-70E740481C1C}">
                             <a14:useLocalDpi xmlns:a14="http://schemas.microsoft.com/office/drawing/2010/main" val="0"/>
@@ -5508,7 +5496,7 @@
           <a:p>
             <a:fld id="{565EC11F-76ED-476D-8988-C21CCE28DAF7}" type="datetime1">
               <a:rPr lang="en-US" smtClean="0"/>
-              <a:t>5/6/2025</a:t>
+              <a:t>6/29/2025</a:t>
             </a:fld>
             <a:endParaRPr lang="en-US"/>
           </a:p>
@@ -5530,7 +5518,7 @@
           <a:lstStyle/>
           <a:p>
             <a:r>
-              <a:rPr lang="en-US" smtClean="0"/>
+              <a:rPr lang="en-US"/>
               <a:t>By: Arjun Singh Saud</a:t>
             </a:r>
             <a:endParaRPr lang="en-US" dirty="0"/>
@@ -5548,13 +5536,6 @@
     <a:masterClrMapping/>
   </p:clrMapOvr>
   <p:transition/>
-  <p:timing>
-    <p:tnLst>
-      <p:par>
-        <p:cTn id="1" dur="indefinite" restart="never" nodeType="tmRoot"/>
-      </p:par>
-    </p:tnLst>
-  </p:timing>
 </p:sld>
 </file>
 
@@ -5594,7 +5575,7 @@
           <a:p>
             <a:pPr eaLnBrk="1" hangingPunct="1"/>
             <a:r>
-              <a:rPr lang="en-US" altLang="en-US" sz="3600" b="1" dirty="0" smtClean="0">
+              <a:rPr lang="en-US" altLang="en-US" sz="3600" b="1" dirty="0">
                 <a:latin typeface="Book Antiqua" pitchFamily="18" charset="0"/>
               </a:rPr>
               <a:t>Logistic Regression Cost Function</a:t>
@@ -5626,7 +5607,7 @@
           <a:p>
             <a:pPr marL="284163" indent="-284163" algn="just"/>
             <a:r>
-              <a:rPr lang="en-US" sz="2800" dirty="0" smtClean="0">
+              <a:rPr lang="en-US" sz="2800" dirty="0">
                 <a:latin typeface="Book Antiqua" pitchFamily="18" charset="0"/>
               </a:rPr>
               <a:t>This is a desirable property: we want a bigger penalty as the algorithm predicts something far away from the actual value. the same intuition applies when y=0.</a:t>
@@ -5635,14 +5616,11 @@
           <a:p>
             <a:pPr marL="284163" indent="-284163" algn="just"/>
             <a:r>
-              <a:rPr lang="en-US" sz="2800" dirty="0" smtClean="0">
+              <a:rPr lang="en-US" sz="2800" dirty="0">
                 <a:latin typeface="Book Antiqua" pitchFamily="18" charset="0"/>
               </a:rPr>
               <a:t>Thus, cost function for Logistic regression is given as:</a:t>
             </a:r>
-            <a:endParaRPr lang="en-US" sz="2800" dirty="0">
-              <a:latin typeface="Book Antiqua" pitchFamily="18" charset="0"/>
-            </a:endParaRPr>
           </a:p>
         </p:txBody>
       </p:sp>
@@ -5921,23 +5899,23 @@
           <a:graphicData uri="http://schemas.openxmlformats.org/presentationml/2006/ole">
             <mc:AlternateContent xmlns:mc="http://schemas.openxmlformats.org/markup-compatibility/2006">
               <mc:Choice xmlns:v="urn:schemas-microsoft-com:vml" Requires="v">
-                <p:oleObj spid="_x0000_s5156" name="Equation" r:id="rId3" imgW="2184120" imgH="203040" progId="Equation.3">
+                <p:oleObj name="Equation" r:id="rId2" imgW="2184120" imgH="203040" progId="Equation.3">
                   <p:embed/>
                 </p:oleObj>
               </mc:Choice>
               <mc:Fallback>
-                <p:oleObj name="Equation" r:id="rId3" imgW="2184120" imgH="203040" progId="Equation.3">
+                <p:oleObj name="Equation" r:id="rId2" imgW="2184120" imgH="203040" progId="Equation.3">
                   <p:embed/>
                   <p:pic>
                     <p:nvPicPr>
-                      <p:cNvPr id="0" name=""/>
+                      <p:cNvPr id="47105" name="Object 1"/>
                       <p:cNvPicPr>
                         <a:picLocks noChangeAspect="1" noChangeArrowheads="1"/>
                       </p:cNvPicPr>
                       <p:nvPr/>
                     </p:nvPicPr>
                     <p:blipFill>
-                      <a:blip r:embed="rId4"/>
+                      <a:blip r:embed="rId3"/>
                       <a:srcRect/>
                       <a:stretch>
                         <a:fillRect/>
@@ -5977,7 +5955,7 @@
           <a:p>
             <a:fld id="{26226C7F-2949-4B29-822B-1C12B7CCB79A}" type="datetime1">
               <a:rPr lang="en-US" smtClean="0"/>
-              <a:t>5/6/2025</a:t>
+              <a:t>6/29/2025</a:t>
             </a:fld>
             <a:endParaRPr lang="en-US"/>
           </a:p>
@@ -5999,7 +5977,7 @@
           <a:lstStyle/>
           <a:p>
             <a:r>
-              <a:rPr lang="en-US" smtClean="0"/>
+              <a:rPr lang="en-US"/>
               <a:t>By: Arjun Singh Saud</a:t>
             </a:r>
             <a:endParaRPr lang="en-US" dirty="0"/>
@@ -6017,13 +5995,6 @@
     <a:masterClrMapping/>
   </p:clrMapOvr>
   <p:transition/>
-  <p:timing>
-    <p:tnLst>
-      <p:par>
-        <p:cTn id="1" dur="indefinite" restart="never" nodeType="tmRoot"/>
-      </p:par>
-    </p:tnLst>
-  </p:timing>
 </p:sld>
 </file>
 
@@ -6063,7 +6034,7 @@
           <a:p>
             <a:pPr eaLnBrk="1" hangingPunct="1"/>
             <a:r>
-              <a:rPr lang="en-US" altLang="en-US" sz="3600" b="1" dirty="0" smtClean="0">
+              <a:rPr lang="en-US" altLang="en-US" sz="3600" b="1" dirty="0">
                 <a:latin typeface="Book Antiqua" pitchFamily="18" charset="0"/>
               </a:rPr>
               <a:t>Logistic Regression GD/Derivatives</a:t>
@@ -6094,25 +6065,25 @@
           <a:lstStyle/>
           <a:p>
             <a:pPr marL="284163" indent="-284163" algn="just"/>
-            <a:endParaRPr lang="en-US" sz="2800" dirty="0" smtClean="0">
+            <a:endParaRPr lang="en-US" sz="2800" dirty="0">
               <a:latin typeface="Book Antiqua" pitchFamily="18" charset="0"/>
             </a:endParaRPr>
           </a:p>
           <a:p>
             <a:pPr marL="284163" indent="-284163" algn="just"/>
-            <a:endParaRPr lang="en-US" sz="2800" dirty="0" smtClean="0">
+            <a:endParaRPr lang="en-US" sz="2800" dirty="0">
               <a:latin typeface="Book Antiqua" pitchFamily="18" charset="0"/>
             </a:endParaRPr>
           </a:p>
           <a:p>
             <a:pPr marL="284163" indent="-284163" algn="just"/>
-            <a:endParaRPr lang="en-US" sz="2800" dirty="0" smtClean="0">
+            <a:endParaRPr lang="en-US" sz="2800" dirty="0">
               <a:latin typeface="Book Antiqua" pitchFamily="18" charset="0"/>
             </a:endParaRPr>
           </a:p>
           <a:p>
             <a:pPr marL="284163" indent="-284163" algn="just"/>
-            <a:endParaRPr lang="en-US" sz="2800" dirty="0" smtClean="0">
+            <a:endParaRPr lang="en-US" sz="2800" dirty="0">
               <a:latin typeface="Book Antiqua" pitchFamily="18" charset="0"/>
             </a:endParaRPr>
           </a:p>
@@ -6515,23 +6486,23 @@
           <a:graphicData uri="http://schemas.openxmlformats.org/presentationml/2006/ole">
             <mc:AlternateContent xmlns:mc="http://schemas.openxmlformats.org/markup-compatibility/2006">
               <mc:Choice xmlns:v="urn:schemas-microsoft-com:vml" Requires="v">
-                <p:oleObj spid="_x0000_s6212" name="Equation" r:id="rId3" imgW="1028520" imgH="419040" progId="Equation.3">
+                <p:oleObj name="Equation" r:id="rId2" imgW="1028520" imgH="419040" progId="Equation.3">
                   <p:embed/>
                 </p:oleObj>
               </mc:Choice>
               <mc:Fallback>
-                <p:oleObj name="Equation" r:id="rId3" imgW="1028520" imgH="419040" progId="Equation.3">
+                <p:oleObj name="Equation" r:id="rId2" imgW="1028520" imgH="419040" progId="Equation.3">
                   <p:embed/>
                   <p:pic>
                     <p:nvPicPr>
-                      <p:cNvPr id="0" name=""/>
+                      <p:cNvPr id="62471" name="Object 7"/>
                       <p:cNvPicPr>
                         <a:picLocks noChangeAspect="1" noChangeArrowheads="1"/>
                       </p:cNvPicPr>
                       <p:nvPr/>
                     </p:nvPicPr>
                     <p:blipFill>
-                      <a:blip r:embed="rId4"/>
+                      <a:blip r:embed="rId3"/>
                       <a:srcRect/>
                       <a:stretch>
                         <a:fillRect/>
@@ -6614,23 +6585,23 @@
           <a:graphicData uri="http://schemas.openxmlformats.org/presentationml/2006/ole">
             <mc:AlternateContent xmlns:mc="http://schemas.openxmlformats.org/markup-compatibility/2006">
               <mc:Choice xmlns:v="urn:schemas-microsoft-com:vml" Requires="v">
-                <p:oleObj spid="_x0000_s6213" name="Equation" r:id="rId5" imgW="3111480" imgH="685800" progId="Equation.3">
+                <p:oleObj name="Equation" r:id="rId4" imgW="3111480" imgH="685800" progId="Equation.3">
                   <p:embed/>
                 </p:oleObj>
               </mc:Choice>
               <mc:Fallback>
-                <p:oleObj name="Equation" r:id="rId5" imgW="3111480" imgH="685800" progId="Equation.3">
+                <p:oleObj name="Equation" r:id="rId4" imgW="3111480" imgH="685800" progId="Equation.3">
                   <p:embed/>
                   <p:pic>
                     <p:nvPicPr>
-                      <p:cNvPr id="0" name=""/>
+                      <p:cNvPr id="62473" name="Object 9"/>
                       <p:cNvPicPr>
                         <a:picLocks noChangeAspect="1" noChangeArrowheads="1"/>
                       </p:cNvPicPr>
                       <p:nvPr/>
                     </p:nvPicPr>
                     <p:blipFill>
-                      <a:blip r:embed="rId6"/>
+                      <a:blip r:embed="rId5"/>
                       <a:srcRect/>
                       <a:stretch>
                         <a:fillRect/>
@@ -6708,7 +6679,7 @@
           <a:p>
             <a:fld id="{256AFE3E-A555-4BAE-B1D2-490FB5D2E281}" type="datetime1">
               <a:rPr lang="en-US" smtClean="0"/>
-              <a:t>5/6/2025</a:t>
+              <a:t>6/29/2025</a:t>
             </a:fld>
             <a:endParaRPr lang="en-US"/>
           </a:p>
@@ -6730,7 +6701,7 @@
           <a:lstStyle/>
           <a:p>
             <a:r>
-              <a:rPr lang="en-US" smtClean="0"/>
+              <a:rPr lang="en-US"/>
               <a:t>By: Arjun Singh Saud</a:t>
             </a:r>
             <a:endParaRPr lang="en-US" dirty="0"/>
@@ -6748,13 +6719,6 @@
     <a:masterClrMapping/>
   </p:clrMapOvr>
   <p:transition/>
-  <p:timing>
-    <p:tnLst>
-      <p:par>
-        <p:cTn id="1" dur="indefinite" restart="never" nodeType="tmRoot"/>
-      </p:par>
-    </p:tnLst>
-  </p:timing>
 </p:sld>
 </file>
 
@@ -6794,7 +6758,7 @@
           <a:p>
             <a:pPr eaLnBrk="1" hangingPunct="1"/>
             <a:r>
-              <a:rPr lang="en-US" altLang="en-US" sz="3600" b="1" dirty="0" smtClean="0">
+              <a:rPr lang="en-US" altLang="en-US" sz="3600" b="1" dirty="0">
                 <a:latin typeface="Book Antiqua" pitchFamily="18" charset="0"/>
               </a:rPr>
               <a:t>Logistic Regression GD/Derivatives</a:t>
@@ -6825,25 +6789,25 @@
           <a:lstStyle/>
           <a:p>
             <a:pPr marL="284163" indent="-284163" algn="just"/>
-            <a:endParaRPr lang="en-US" sz="2800" dirty="0" smtClean="0">
+            <a:endParaRPr lang="en-US" sz="2800" dirty="0">
               <a:latin typeface="Book Antiqua" pitchFamily="18" charset="0"/>
             </a:endParaRPr>
           </a:p>
           <a:p>
             <a:pPr marL="284163" indent="-284163" algn="just"/>
-            <a:endParaRPr lang="en-US" sz="2800" dirty="0" smtClean="0">
+            <a:endParaRPr lang="en-US" sz="2800" dirty="0">
               <a:latin typeface="Book Antiqua" pitchFamily="18" charset="0"/>
             </a:endParaRPr>
           </a:p>
           <a:p>
             <a:pPr marL="284163" indent="-284163" algn="just"/>
-            <a:endParaRPr lang="en-US" sz="2800" dirty="0" smtClean="0">
+            <a:endParaRPr lang="en-US" sz="2800" dirty="0">
               <a:latin typeface="Book Antiqua" pitchFamily="18" charset="0"/>
             </a:endParaRPr>
           </a:p>
           <a:p>
             <a:pPr marL="284163" indent="-284163" algn="just"/>
-            <a:endParaRPr lang="en-US" sz="2800" dirty="0" smtClean="0">
+            <a:endParaRPr lang="en-US" sz="2800" dirty="0">
               <a:latin typeface="Book Antiqua" pitchFamily="18" charset="0"/>
             </a:endParaRPr>
           </a:p>
@@ -7322,23 +7286,23 @@
           <a:graphicData uri="http://schemas.openxmlformats.org/presentationml/2006/ole">
             <mc:AlternateContent xmlns:mc="http://schemas.openxmlformats.org/markup-compatibility/2006">
               <mc:Choice xmlns:v="urn:schemas-microsoft-com:vml" Requires="v">
-                <p:oleObj spid="_x0000_s7264" name="Equation" r:id="rId3" imgW="1815840" imgH="431640" progId="Equation.3">
+                <p:oleObj name="Equation" r:id="rId2" imgW="1815840" imgH="431640" progId="Equation.3">
                   <p:embed/>
                 </p:oleObj>
               </mc:Choice>
               <mc:Fallback>
-                <p:oleObj name="Equation" r:id="rId3" imgW="1815840" imgH="431640" progId="Equation.3">
+                <p:oleObj name="Equation" r:id="rId2" imgW="1815840" imgH="431640" progId="Equation.3">
                   <p:embed/>
                   <p:pic>
                     <p:nvPicPr>
-                      <p:cNvPr id="0" name=""/>
+                      <p:cNvPr id="62475" name="Object 11"/>
                       <p:cNvPicPr>
                         <a:picLocks noChangeAspect="1" noChangeArrowheads="1"/>
                       </p:cNvPicPr>
                       <p:nvPr/>
                     </p:nvPicPr>
                     <p:blipFill>
-                      <a:blip r:embed="rId4"/>
+                      <a:blip r:embed="rId3"/>
                       <a:srcRect/>
                       <a:stretch>
                         <a:fillRect/>
@@ -7378,7 +7342,7 @@
           <a:p>
             <a:fld id="{276FFC1C-95B5-41EE-ADC6-B774B1D0C75D}" type="datetime1">
               <a:rPr lang="en-US" smtClean="0"/>
-              <a:t>5/6/2025</a:t>
+              <a:t>6/29/2025</a:t>
             </a:fld>
             <a:endParaRPr lang="en-US"/>
           </a:p>
@@ -7400,7 +7364,7 @@
           <a:lstStyle/>
           <a:p>
             <a:r>
-              <a:rPr lang="en-US" smtClean="0"/>
+              <a:rPr lang="en-US"/>
               <a:t>By: Arjun Singh Saud</a:t>
             </a:r>
             <a:endParaRPr lang="en-US" dirty="0"/>
@@ -7429,23 +7393,23 @@
           <a:graphicData uri="http://schemas.openxmlformats.org/presentationml/2006/ole">
             <mc:AlternateContent xmlns:mc="http://schemas.openxmlformats.org/markup-compatibility/2006">
               <mc:Choice xmlns:v="urn:schemas-microsoft-com:vml" Requires="v">
-                <p:oleObj spid="_x0000_s7265" name="Equation" r:id="rId5" imgW="1917360" imgH="431640" progId="Equation.3">
+                <p:oleObj name="Equation" r:id="rId4" imgW="1917360" imgH="431640" progId="Equation.3">
                   <p:embed/>
                 </p:oleObj>
               </mc:Choice>
               <mc:Fallback>
-                <p:oleObj name="Equation" r:id="rId5" imgW="1917360" imgH="431640" progId="Equation.3">
+                <p:oleObj name="Equation" r:id="rId4" imgW="1917360" imgH="431640" progId="Equation.3">
                   <p:embed/>
                   <p:pic>
                     <p:nvPicPr>
-                      <p:cNvPr id="0" name=""/>
+                      <p:cNvPr id="23" name="Object 11"/>
                       <p:cNvPicPr>
                         <a:picLocks noChangeAspect="1" noChangeArrowheads="1"/>
                       </p:cNvPicPr>
                       <p:nvPr/>
                     </p:nvPicPr>
                     <p:blipFill>
-                      <a:blip r:embed="rId6"/>
+                      <a:blip r:embed="rId5"/>
                       <a:srcRect/>
                       <a:stretch>
                         <a:fillRect/>
@@ -7490,23 +7454,23 @@
           <a:graphicData uri="http://schemas.openxmlformats.org/presentationml/2006/ole">
             <mc:AlternateContent xmlns:mc="http://schemas.openxmlformats.org/markup-compatibility/2006">
               <mc:Choice xmlns:v="urn:schemas-microsoft-com:vml" Requires="v">
-                <p:oleObj spid="_x0000_s7266" name="Equation" r:id="rId7" imgW="1968480" imgH="431640" progId="Equation.3">
+                <p:oleObj name="Equation" r:id="rId6" imgW="1968480" imgH="431640" progId="Equation.3">
                   <p:embed/>
                 </p:oleObj>
               </mc:Choice>
               <mc:Fallback>
-                <p:oleObj name="Equation" r:id="rId7" imgW="1968480" imgH="431640" progId="Equation.3">
+                <p:oleObj name="Equation" r:id="rId6" imgW="1968480" imgH="431640" progId="Equation.3">
                   <p:embed/>
                   <p:pic>
                     <p:nvPicPr>
-                      <p:cNvPr id="0" name=""/>
+                      <p:cNvPr id="24" name="Object 11"/>
                       <p:cNvPicPr>
                         <a:picLocks noChangeAspect="1" noChangeArrowheads="1"/>
                       </p:cNvPicPr>
                       <p:nvPr/>
                     </p:nvPicPr>
                     <p:blipFill>
-                      <a:blip r:embed="rId8"/>
+                      <a:blip r:embed="rId7"/>
                       <a:srcRect/>
                       <a:stretch>
                         <a:fillRect/>
@@ -7540,13 +7504,6 @@
     <a:masterClrMapping/>
   </p:clrMapOvr>
   <p:transition/>
-  <p:timing>
-    <p:tnLst>
-      <p:par>
-        <p:cTn id="1" dur="indefinite" restart="never" nodeType="tmRoot"/>
-      </p:par>
-    </p:tnLst>
-  </p:timing>
 </p:sld>
 </file>
 
@@ -7586,7 +7543,7 @@
           <a:p>
             <a:pPr eaLnBrk="1" hangingPunct="1"/>
             <a:r>
-              <a:rPr lang="en-US" altLang="en-US" sz="3600" b="1" dirty="0" smtClean="0">
+              <a:rPr lang="en-US" altLang="en-US" sz="3600" b="1" dirty="0">
                 <a:latin typeface="Book Antiqua" pitchFamily="18" charset="0"/>
               </a:rPr>
               <a:t>Logistic Regression</a:t>
@@ -7613,7 +7570,7 @@
           <a:p>
             <a:pPr algn="just"/>
             <a:r>
-              <a:rPr lang="en-US" sz="2800" dirty="0" smtClean="0">
+              <a:rPr lang="en-US" sz="2800" dirty="0">
                 <a:latin typeface="Book Antiqua" pitchFamily="18" charset="0"/>
               </a:rPr>
               <a:t>Thus, parameters of Logistic Regression are updated as below:</a:t>
@@ -7624,36 +7581,36 @@
               <a:buNone/>
             </a:pPr>
             <a:r>
-              <a:rPr lang="en-US" sz="2800" i="1" dirty="0" smtClean="0">
+              <a:rPr lang="en-US" sz="2800" i="1" dirty="0">
                 <a:latin typeface="Book Antiqua" pitchFamily="18" charset="0"/>
               </a:rPr>
               <a:t>	</a:t>
             </a:r>
-            <a:endParaRPr lang="en-US" sz="2800" dirty="0" smtClean="0">
+            <a:endParaRPr lang="en-US" sz="2800" dirty="0">
               <a:latin typeface="Book Antiqua" pitchFamily="18" charset="0"/>
             </a:endParaRPr>
           </a:p>
           <a:p>
             <a:pPr marL="284163" indent="-284163" algn="just"/>
-            <a:endParaRPr lang="en-US" sz="2800" dirty="0" smtClean="0">
+            <a:endParaRPr lang="en-US" sz="2800" dirty="0">
               <a:latin typeface="Book Antiqua" pitchFamily="18" charset="0"/>
             </a:endParaRPr>
           </a:p>
           <a:p>
             <a:pPr marL="284163" indent="-284163" algn="just"/>
-            <a:endParaRPr lang="en-US" sz="2800" dirty="0" smtClean="0">
+            <a:endParaRPr lang="en-US" sz="2800" dirty="0">
               <a:latin typeface="Book Antiqua" pitchFamily="18" charset="0"/>
             </a:endParaRPr>
           </a:p>
           <a:p>
             <a:pPr marL="284163" indent="-284163" algn="just"/>
-            <a:endParaRPr lang="en-US" sz="2800" dirty="0" smtClean="0">
+            <a:endParaRPr lang="en-US" sz="2800" dirty="0">
               <a:latin typeface="Book Antiqua" pitchFamily="18" charset="0"/>
             </a:endParaRPr>
           </a:p>
           <a:p>
             <a:pPr marL="284163" indent="-284163" algn="just"/>
-            <a:endParaRPr lang="en-US" sz="2800" dirty="0" smtClean="0">
+            <a:endParaRPr lang="en-US" sz="2800" dirty="0">
               <a:latin typeface="Book Antiqua" pitchFamily="18" charset="0"/>
             </a:endParaRPr>
           </a:p>
@@ -8170,23 +8127,23 @@
           <a:graphicData uri="http://schemas.openxmlformats.org/presentationml/2006/ole">
             <mc:AlternateContent xmlns:mc="http://schemas.openxmlformats.org/markup-compatibility/2006">
               <mc:Choice xmlns:v="urn:schemas-microsoft-com:vml" Requires="v">
-                <p:oleObj spid="_x0000_s8224" name="Equation" r:id="rId3" imgW="1028520" imgH="1320480" progId="Equation.3">
+                <p:oleObj name="Equation" r:id="rId2" imgW="1028520" imgH="1320480" progId="Equation.3">
                   <p:embed/>
                 </p:oleObj>
               </mc:Choice>
               <mc:Fallback>
-                <p:oleObj name="Equation" r:id="rId3" imgW="1028520" imgH="1320480" progId="Equation.3">
+                <p:oleObj name="Equation" r:id="rId2" imgW="1028520" imgH="1320480" progId="Equation.3">
                   <p:embed/>
                   <p:pic>
                     <p:nvPicPr>
-                      <p:cNvPr id="0" name=""/>
+                      <p:cNvPr id="63498" name="Object 10"/>
                       <p:cNvPicPr>
                         <a:picLocks noChangeAspect="1" noChangeArrowheads="1"/>
                       </p:cNvPicPr>
                       <p:nvPr/>
                     </p:nvPicPr>
                     <p:blipFill>
-                      <a:blip r:embed="rId4"/>
+                      <a:blip r:embed="rId3"/>
                       <a:srcRect/>
                       <a:stretch>
                         <a:fillRect/>
@@ -8235,7 +8192,7 @@
           <a:p>
             <a:fld id="{4C634159-3CB5-4A2E-8959-19D821F7CCDC}" type="datetime1">
               <a:rPr lang="en-US" smtClean="0"/>
-              <a:t>5/6/2025</a:t>
+              <a:t>6/29/2025</a:t>
             </a:fld>
             <a:endParaRPr lang="en-US"/>
           </a:p>
@@ -8257,7 +8214,7 @@
           <a:lstStyle/>
           <a:p>
             <a:r>
-              <a:rPr lang="en-US" smtClean="0"/>
+              <a:rPr lang="en-US"/>
               <a:t>By: Arjun Singh Saud</a:t>
             </a:r>
             <a:endParaRPr lang="en-US" dirty="0"/>
@@ -8275,13 +8232,6 @@
     <a:masterClrMapping/>
   </p:clrMapOvr>
   <p:transition/>
-  <p:timing>
-    <p:tnLst>
-      <p:par>
-        <p:cTn id="1" dur="indefinite" restart="never" nodeType="tmRoot"/>
-      </p:par>
-    </p:tnLst>
-  </p:timing>
 </p:sld>
 </file>
 
@@ -8357,13 +8307,13 @@
               <a:p>
                 <a:pPr algn="just"/>
                 <a:r>
-                  <a:rPr lang="en-US" sz="2800" b="1" i="1" dirty="0" smtClean="0">
+                  <a:rPr lang="en-US" sz="2800" b="1" i="1" dirty="0">
                     <a:latin typeface="Book Antiqua" panose="02040602050305030304" pitchFamily="18" charset="0"/>
                   </a:rPr>
                   <a:t>Example: </a:t>
                 </a:r>
                 <a:r>
-                  <a:rPr lang="en-US" sz="2800" dirty="0" smtClean="0">
+                  <a:rPr lang="en-US" sz="2800" dirty="0">
                     <a:latin typeface="Book Antiqua" panose="02040602050305030304" pitchFamily="18" charset="0"/>
                   </a:rPr>
                   <a:t>Fit the logistic regression model through the following data. Show one epoch of training.</a:t>
@@ -8379,7 +8329,7 @@
                 <a:pPr marL="0" indent="0" algn="just" fontAlgn="base">
                   <a:buNone/>
                 </a:pPr>
-                <a:endParaRPr lang="en-US" sz="2600" dirty="0" smtClean="0">
+                <a:endParaRPr lang="en-US" sz="2600" dirty="0">
                   <a:latin typeface="Book Antiqua" panose="02040602050305030304" pitchFamily="18" charset="0"/>
                 </a:endParaRPr>
               </a:p>
@@ -8387,7 +8337,7 @@
                 <a:pPr marL="0" indent="0" algn="just" fontAlgn="base">
                   <a:buNone/>
                 </a:pPr>
-                <a:endParaRPr lang="en-US" sz="2600" b="1" u="sng" dirty="0" smtClean="0">
+                <a:endParaRPr lang="en-US" sz="2600" b="1" u="sng" dirty="0">
                   <a:latin typeface="Book Antiqua" panose="02040602050305030304" pitchFamily="18" charset="0"/>
                 </a:endParaRPr>
               </a:p>
@@ -8395,7 +8345,7 @@
                 <a:pPr marL="0" indent="0" algn="just" fontAlgn="base">
                   <a:buNone/>
                 </a:pPr>
-                <a:endParaRPr lang="en-US" sz="2600" b="1" u="sng" dirty="0" smtClean="0">
+                <a:endParaRPr lang="en-US" sz="2600" b="1" u="sng" dirty="0">
                   <a:latin typeface="Book Antiqua" panose="02040602050305030304" pitchFamily="18" charset="0"/>
                 </a:endParaRPr>
               </a:p>
@@ -8404,7 +8354,7 @@
                   <a:buNone/>
                 </a:pPr>
                 <a:r>
-                  <a:rPr lang="en-US" sz="2600" b="1" u="sng" dirty="0" smtClean="0">
+                  <a:rPr lang="en-US" sz="2600" b="1" u="sng" dirty="0">
                     <a:latin typeface="Book Antiqua" panose="02040602050305030304" pitchFamily="18" charset="0"/>
                   </a:rPr>
                   <a:t>Solution</a:t>
@@ -8415,7 +8365,7 @@
                   <a:buNone/>
                 </a:pPr>
                 <a:r>
-                  <a:rPr lang="en-US" sz="2600" dirty="0" smtClean="0">
+                  <a:rPr lang="en-US" sz="2600" dirty="0">
                     <a:latin typeface="Book Antiqua" panose="02040602050305030304" pitchFamily="18" charset="0"/>
                   </a:rPr>
                   <a:t>General form of logistic regression equation is: </a:t>
@@ -8573,7 +8523,7 @@
                     </m:sSub>
                   </m:oMath>
                 </a14:m>
-                <a:endParaRPr lang="en-US" sz="2600" dirty="0" smtClean="0">
+                <a:endParaRPr lang="en-US" sz="2600" dirty="0">
                   <a:latin typeface="Book Antiqua" panose="02040602050305030304" pitchFamily="18" charset="0"/>
                 </a:endParaRPr>
               </a:p>
@@ -8582,7 +8532,7 @@
                   <a:buNone/>
                 </a:pPr>
                 <a:r>
-                  <a:rPr lang="en-US" sz="2600" dirty="0" smtClean="0">
+                  <a:rPr lang="en-US" sz="2600" dirty="0">
                     <a:latin typeface="Book Antiqua" panose="02040602050305030304" pitchFamily="18" charset="0"/>
                   </a:rPr>
                   <a:t>Let us assume that initial values of parameters are:</a:t>
@@ -8694,7 +8644,7 @@
                     </m:oMath>
                   </m:oMathPara>
                 </a14:m>
-                <a:endParaRPr lang="en-US" sz="2600" dirty="0" smtClean="0">
+                <a:endParaRPr lang="en-US" sz="2600" dirty="0">
                   <a:latin typeface="Book Antiqua" panose="02040602050305030304" pitchFamily="18" charset="0"/>
                 </a:endParaRPr>
               </a:p>
@@ -8772,9 +8722,27 @@
                 <a:tableStyleId>{5C22544A-7EE6-4342-B048-85BDC9FD1C3A}</a:tableStyleId>
               </a:tblPr>
               <a:tblGrid>
-                <a:gridCol w="590550"/>
-                <a:gridCol w="590550"/>
-                <a:gridCol w="1216195"/>
+                <a:gridCol w="590550">
+                  <a:extLst>
+                    <a:ext uri="{9D8B030D-6E8A-4147-A177-3AD203B41FA5}">
+                      <a16:colId xmlns:a16="http://schemas.microsoft.com/office/drawing/2014/main" val="20000"/>
+                    </a:ext>
+                  </a:extLst>
+                </a:gridCol>
+                <a:gridCol w="590550">
+                  <a:extLst>
+                    <a:ext uri="{9D8B030D-6E8A-4147-A177-3AD203B41FA5}">
+                      <a16:colId xmlns:a16="http://schemas.microsoft.com/office/drawing/2014/main" val="20001"/>
+                    </a:ext>
+                  </a:extLst>
+                </a:gridCol>
+                <a:gridCol w="1216195">
+                  <a:extLst>
+                    <a:ext uri="{9D8B030D-6E8A-4147-A177-3AD203B41FA5}">
+                      <a16:colId xmlns:a16="http://schemas.microsoft.com/office/drawing/2014/main" val="20002"/>
+                    </a:ext>
+                  </a:extLst>
+                </a:gridCol>
               </a:tblGrid>
               <a:tr h="370840">
                 <a:tc>
@@ -8783,13 +8751,13 @@
                     <a:lstStyle/>
                     <a:p>
                       <a:r>
-                        <a:rPr lang="en-US" i="1" dirty="0" smtClean="0">
+                        <a:rPr lang="en-US" i="1" dirty="0">
                           <a:latin typeface="Book Antiqua" pitchFamily="18" charset="0"/>
                         </a:rPr>
                         <a:t>x</a:t>
                       </a:r>
                       <a:r>
-                        <a:rPr lang="en-US" i="1" baseline="-25000" dirty="0" smtClean="0">
+                        <a:rPr lang="en-US" i="1" baseline="-25000" dirty="0">
                           <a:latin typeface="Book Antiqua" pitchFamily="18" charset="0"/>
                         </a:rPr>
                         <a:t>1</a:t>
@@ -8824,13 +8792,13 @@
                         <a:defRPr/>
                       </a:pPr>
                       <a:r>
-                        <a:rPr lang="en-US" i="1" dirty="0" smtClean="0">
+                        <a:rPr lang="en-US" i="1" dirty="0">
                           <a:latin typeface="Book Antiqua" pitchFamily="18" charset="0"/>
                         </a:rPr>
                         <a:t>x</a:t>
                       </a:r>
                       <a:r>
-                        <a:rPr lang="en-US" i="1" baseline="-25000" dirty="0" smtClean="0">
+                        <a:rPr lang="en-US" i="1" baseline="-25000" dirty="0">
                           <a:latin typeface="Book Antiqua" pitchFamily="18" charset="0"/>
                         </a:rPr>
                         <a:t>2</a:t>
@@ -8848,18 +8816,20 @@
                     <a:lstStyle/>
                     <a:p>
                       <a:r>
-                        <a:rPr lang="en-US" i="1" dirty="0" smtClean="0">
+                        <a:rPr lang="en-US" i="1" dirty="0">
                           <a:latin typeface="Book Antiqua" pitchFamily="18" charset="0"/>
                         </a:rPr>
                         <a:t>Class(y)</a:t>
                       </a:r>
-                      <a:endParaRPr lang="en-US" i="1" dirty="0">
-                        <a:latin typeface="Book Antiqua" pitchFamily="18" charset="0"/>
-                      </a:endParaRPr>
                     </a:p>
                   </a:txBody>
                   <a:tcPr/>
                 </a:tc>
+                <a:extLst>
+                  <a:ext uri="{0D108BD9-81ED-4DB2-BD59-A6C34878D82A}">
+                    <a16:rowId xmlns:a16="http://schemas.microsoft.com/office/drawing/2014/main" val="10000"/>
+                  </a:ext>
+                </a:extLst>
               </a:tr>
               <a:tr h="370840">
                 <a:tc>
@@ -8869,7 +8839,7 @@
                     <a:p>
                       <a:pPr algn="ctr" fontAlgn="b"/>
                       <a:r>
-                        <a:rPr lang="en-US" sz="1800" b="0" i="0" u="none" strike="noStrike" dirty="0" smtClean="0">
+                        <a:rPr lang="en-US" sz="1800" b="0" i="0" u="none" strike="noStrike" dirty="0">
                           <a:solidFill>
                             <a:srgbClr val="000000"/>
                           </a:solidFill>
@@ -8877,12 +8847,6 @@
                         </a:rPr>
                         <a:t>0.78</a:t>
                       </a:r>
-                      <a:endParaRPr lang="en-US" sz="1800" b="0" i="0" u="none" strike="noStrike" dirty="0">
-                        <a:solidFill>
-                          <a:srgbClr val="000000"/>
-                        </a:solidFill>
-                        <a:latin typeface="Book Antiqua"/>
-                      </a:endParaRPr>
                     </a:p>
                   </a:txBody>
                   <a:tcPr marL="9525" marR="9525" marT="9525" marB="0" anchor="b"/>
@@ -8894,7 +8858,7 @@
                     <a:p>
                       <a:pPr algn="ctr" fontAlgn="b"/>
                       <a:r>
-                        <a:rPr lang="en-US" sz="1800" b="0" i="0" u="none" strike="noStrike" dirty="0" smtClean="0">
+                        <a:rPr lang="en-US" sz="1800" b="0" i="0" u="none" strike="noStrike" dirty="0">
                           <a:solidFill>
                             <a:srgbClr val="000000"/>
                           </a:solidFill>
@@ -8902,12 +8866,6 @@
                         </a:rPr>
                         <a:t>0.69</a:t>
                       </a:r>
-                      <a:endParaRPr lang="en-US" sz="1800" b="0" i="0" u="none" strike="noStrike" dirty="0">
-                        <a:solidFill>
-                          <a:srgbClr val="000000"/>
-                        </a:solidFill>
-                        <a:latin typeface="Book Antiqua"/>
-                      </a:endParaRPr>
                     </a:p>
                   </a:txBody>
                   <a:tcPr marL="9525" marR="9525" marT="9525" marB="0" anchor="b"/>
@@ -8919,7 +8877,7 @@
                     <a:p>
                       <a:pPr algn="ctr" fontAlgn="b"/>
                       <a:r>
-                        <a:rPr lang="en-US" sz="1800" b="0" i="0" u="none" strike="noStrike" dirty="0" smtClean="0">
+                        <a:rPr lang="en-US" sz="1800" b="0" i="0" u="none" strike="noStrike" dirty="0">
                           <a:solidFill>
                             <a:srgbClr val="000000"/>
                           </a:solidFill>
@@ -8927,16 +8885,15 @@
                         </a:rPr>
                         <a:t>1</a:t>
                       </a:r>
-                      <a:endParaRPr lang="en-US" sz="1800" b="0" i="0" u="none" strike="noStrike" dirty="0">
-                        <a:solidFill>
-                          <a:srgbClr val="000000"/>
-                        </a:solidFill>
-                        <a:latin typeface="Book Antiqua"/>
-                      </a:endParaRPr>
                     </a:p>
                   </a:txBody>
                   <a:tcPr marL="9525" marR="9525" marT="9525" marB="0" anchor="b"/>
                 </a:tc>
+                <a:extLst>
+                  <a:ext uri="{0D108BD9-81ED-4DB2-BD59-A6C34878D82A}">
+                    <a16:rowId xmlns:a16="http://schemas.microsoft.com/office/drawing/2014/main" val="10001"/>
+                  </a:ext>
+                </a:extLst>
               </a:tr>
               <a:tr h="370840">
                 <a:tc>
@@ -8946,7 +8903,7 @@
                     <a:p>
                       <a:pPr algn="ctr" fontAlgn="b"/>
                       <a:r>
-                        <a:rPr lang="en-US" sz="1800" b="0" i="0" u="none" strike="noStrike" dirty="0" smtClean="0">
+                        <a:rPr lang="en-US" sz="1800" b="0" i="0" u="none" strike="noStrike" dirty="0">
                           <a:solidFill>
                             <a:srgbClr val="000000"/>
                           </a:solidFill>
@@ -8954,12 +8911,6 @@
                         </a:rPr>
                         <a:t>0.67</a:t>
                       </a:r>
-                      <a:endParaRPr lang="en-US" sz="1800" b="0" i="0" u="none" strike="noStrike" dirty="0">
-                        <a:solidFill>
-                          <a:srgbClr val="000000"/>
-                        </a:solidFill>
-                        <a:latin typeface="Book Antiqua"/>
-                      </a:endParaRPr>
                     </a:p>
                   </a:txBody>
                   <a:tcPr marL="9525" marR="9525" marT="9525" marB="0" anchor="b"/>
@@ -8971,7 +8922,7 @@
                     <a:p>
                       <a:pPr algn="ctr" fontAlgn="b"/>
                       <a:r>
-                        <a:rPr lang="en-US" sz="1800" b="0" i="0" u="none" strike="noStrike" dirty="0" smtClean="0">
+                        <a:rPr lang="en-US" sz="1800" b="0" i="0" u="none" strike="noStrike" dirty="0">
                           <a:solidFill>
                             <a:srgbClr val="000000"/>
                           </a:solidFill>
@@ -8979,12 +8930,6 @@
                         </a:rPr>
                         <a:t>1.00</a:t>
                       </a:r>
-                      <a:endParaRPr lang="en-US" sz="1800" b="0" i="0" u="none" strike="noStrike" dirty="0">
-                        <a:solidFill>
-                          <a:srgbClr val="000000"/>
-                        </a:solidFill>
-                        <a:latin typeface="Book Antiqua"/>
-                      </a:endParaRPr>
                     </a:p>
                   </a:txBody>
                   <a:tcPr marL="9525" marR="9525" marT="9525" marB="0" anchor="b"/>
@@ -8996,7 +8941,7 @@
                     <a:p>
                       <a:pPr algn="ctr" fontAlgn="b"/>
                       <a:r>
-                        <a:rPr lang="en-US" sz="1800" b="0" i="0" u="none" strike="noStrike" dirty="0" smtClean="0">
+                        <a:rPr lang="en-US" sz="1800" b="0" i="0" u="none" strike="noStrike" dirty="0">
                           <a:solidFill>
                             <a:srgbClr val="000000"/>
                           </a:solidFill>
@@ -9004,16 +8949,15 @@
                         </a:rPr>
                         <a:t>1</a:t>
                       </a:r>
-                      <a:endParaRPr lang="en-US" sz="1800" b="0" i="0" u="none" strike="noStrike" dirty="0">
-                        <a:solidFill>
-                          <a:srgbClr val="000000"/>
-                        </a:solidFill>
-                        <a:latin typeface="Book Antiqua"/>
-                      </a:endParaRPr>
                     </a:p>
                   </a:txBody>
                   <a:tcPr marL="9525" marR="9525" marT="9525" marB="0" anchor="b"/>
                 </a:tc>
+                <a:extLst>
+                  <a:ext uri="{0D108BD9-81ED-4DB2-BD59-A6C34878D82A}">
+                    <a16:rowId xmlns:a16="http://schemas.microsoft.com/office/drawing/2014/main" val="10002"/>
+                  </a:ext>
+                </a:extLst>
               </a:tr>
               <a:tr h="370840">
                 <a:tc>
@@ -9023,7 +8967,7 @@
                     <a:p>
                       <a:pPr algn="ctr" fontAlgn="b"/>
                       <a:r>
-                        <a:rPr lang="en-US" sz="1800" b="0" i="0" u="none" strike="noStrike" dirty="0" smtClean="0">
+                        <a:rPr lang="en-US" sz="1800" b="0" i="0" u="none" strike="noStrike" dirty="0">
                           <a:solidFill>
                             <a:srgbClr val="000000"/>
                           </a:solidFill>
@@ -9031,12 +8975,6 @@
                         </a:rPr>
                         <a:t>0.00</a:t>
                       </a:r>
-                      <a:endParaRPr lang="en-US" sz="1800" b="0" i="0" u="none" strike="noStrike" dirty="0">
-                        <a:solidFill>
-                          <a:srgbClr val="000000"/>
-                        </a:solidFill>
-                        <a:latin typeface="Book Antiqua"/>
-                      </a:endParaRPr>
                     </a:p>
                   </a:txBody>
                   <a:tcPr marL="9525" marR="9525" marT="9525" marB="0" anchor="b"/>
@@ -9048,7 +8986,7 @@
                     <a:p>
                       <a:pPr algn="ctr" fontAlgn="b"/>
                       <a:r>
-                        <a:rPr lang="en-US" sz="1800" b="0" i="0" u="none" strike="noStrike" dirty="0" smtClean="0">
+                        <a:rPr lang="en-US" sz="1800" b="0" i="0" u="none" strike="noStrike" dirty="0">
                           <a:solidFill>
                             <a:srgbClr val="000000"/>
                           </a:solidFill>
@@ -9056,12 +8994,6 @@
                         </a:rPr>
                         <a:t>0.00</a:t>
                       </a:r>
-                      <a:endParaRPr lang="en-US" sz="1800" b="0" i="0" u="none" strike="noStrike" dirty="0">
-                        <a:solidFill>
-                          <a:srgbClr val="000000"/>
-                        </a:solidFill>
-                        <a:latin typeface="Book Antiqua"/>
-                      </a:endParaRPr>
                     </a:p>
                   </a:txBody>
                   <a:tcPr marL="9525" marR="9525" marT="9525" marB="0" anchor="b"/>
@@ -9073,7 +9005,7 @@
                     <a:p>
                       <a:pPr algn="ctr" fontAlgn="b"/>
                       <a:r>
-                        <a:rPr lang="en-US" sz="1800" b="0" i="0" u="none" strike="noStrike" dirty="0" smtClean="0">
+                        <a:rPr lang="en-US" sz="1800" b="0" i="0" u="none" strike="noStrike" dirty="0">
                           <a:solidFill>
                             <a:srgbClr val="000000"/>
                           </a:solidFill>
@@ -9081,16 +9013,15 @@
                         </a:rPr>
                         <a:t>0</a:t>
                       </a:r>
-                      <a:endParaRPr lang="en-US" sz="1800" b="0" i="0" u="none" strike="noStrike" dirty="0">
-                        <a:solidFill>
-                          <a:srgbClr val="000000"/>
-                        </a:solidFill>
-                        <a:latin typeface="Book Antiqua"/>
-                      </a:endParaRPr>
                     </a:p>
                   </a:txBody>
                   <a:tcPr marL="9525" marR="9525" marT="9525" marB="0" anchor="b"/>
                 </a:tc>
+                <a:extLst>
+                  <a:ext uri="{0D108BD9-81ED-4DB2-BD59-A6C34878D82A}">
+                    <a16:rowId xmlns:a16="http://schemas.microsoft.com/office/drawing/2014/main" val="10003"/>
+                  </a:ext>
+                </a:extLst>
               </a:tr>
               <a:tr h="370840">
                 <a:tc>
@@ -9100,7 +9031,7 @@
                     <a:p>
                       <a:pPr algn="ctr" fontAlgn="b"/>
                       <a:r>
-                        <a:rPr lang="en-US" sz="1800" b="0" i="0" u="none" strike="noStrike" dirty="0" smtClean="0">
+                        <a:rPr lang="en-US" sz="1800" b="0" i="0" u="none" strike="noStrike" dirty="0">
                           <a:solidFill>
                             <a:srgbClr val="000000"/>
                           </a:solidFill>
@@ -9108,12 +9039,6 @@
                         </a:rPr>
                         <a:t>0.22</a:t>
                       </a:r>
-                      <a:endParaRPr lang="en-US" sz="1800" b="0" i="0" u="none" strike="noStrike" dirty="0">
-                        <a:solidFill>
-                          <a:srgbClr val="000000"/>
-                        </a:solidFill>
-                        <a:latin typeface="Book Antiqua"/>
-                      </a:endParaRPr>
                     </a:p>
                   </a:txBody>
                   <a:tcPr marL="9525" marR="9525" marT="9525" marB="0" anchor="b"/>
@@ -9125,7 +9050,7 @@
                     <a:p>
                       <a:pPr algn="ctr" fontAlgn="b"/>
                       <a:r>
-                        <a:rPr lang="en-US" sz="1800" b="0" i="0" u="none" strike="noStrike" dirty="0" smtClean="0">
+                        <a:rPr lang="en-US" sz="1800" b="0" i="0" u="none" strike="noStrike" dirty="0">
                           <a:solidFill>
                             <a:srgbClr val="000000"/>
                           </a:solidFill>
@@ -9133,12 +9058,6 @@
                         </a:rPr>
                         <a:t>0.14</a:t>
                       </a:r>
-                      <a:endParaRPr lang="en-US" sz="1800" b="0" i="0" u="none" strike="noStrike" dirty="0">
-                        <a:solidFill>
-                          <a:srgbClr val="000000"/>
-                        </a:solidFill>
-                        <a:latin typeface="Book Antiqua"/>
-                      </a:endParaRPr>
                     </a:p>
                   </a:txBody>
                   <a:tcPr marL="9525" marR="9525" marT="9525" marB="0" anchor="b"/>
@@ -9150,7 +9069,7 @@
                     <a:p>
                       <a:pPr algn="ctr" fontAlgn="b"/>
                       <a:r>
-                        <a:rPr lang="en-US" sz="1800" b="0" i="0" u="none" strike="noStrike" dirty="0" smtClean="0">
+                        <a:rPr lang="en-US" sz="1800" b="0" i="0" u="none" strike="noStrike" dirty="0">
                           <a:solidFill>
                             <a:srgbClr val="000000"/>
                           </a:solidFill>
@@ -9158,16 +9077,15 @@
                         </a:rPr>
                         <a:t>0</a:t>
                       </a:r>
-                      <a:endParaRPr lang="en-US" sz="1800" b="0" i="0" u="none" strike="noStrike" dirty="0">
-                        <a:solidFill>
-                          <a:srgbClr val="000000"/>
-                        </a:solidFill>
-                        <a:latin typeface="Book Antiqua"/>
-                      </a:endParaRPr>
                     </a:p>
                   </a:txBody>
                   <a:tcPr marL="9525" marR="9525" marT="9525" marB="0" anchor="b"/>
                 </a:tc>
+                <a:extLst>
+                  <a:ext uri="{0D108BD9-81ED-4DB2-BD59-A6C34878D82A}">
+                    <a16:rowId xmlns:a16="http://schemas.microsoft.com/office/drawing/2014/main" val="10004"/>
+                  </a:ext>
+                </a:extLst>
               </a:tr>
             </a:tbl>
           </a:graphicData>
@@ -9190,7 +9108,7 @@
           <a:p>
             <a:fld id="{64569364-DDA2-4A2A-9402-13B2AFFBEB13}" type="datetime1">
               <a:rPr lang="en-US" smtClean="0"/>
-              <a:t>5/6/2025</a:t>
+              <a:t>6/29/2025</a:t>
             </a:fld>
             <a:endParaRPr lang="en-US"/>
           </a:p>
@@ -9212,10 +9130,9 @@
           <a:lstStyle/>
           <a:p>
             <a:r>
-              <a:rPr lang="en-US" smtClean="0"/>
+              <a:rPr lang="en-US"/>
               <a:t>By: Arjun Singh Saud</a:t>
             </a:r>
-            <a:endParaRPr lang="en-US"/>
           </a:p>
         </p:txBody>
       </p:sp>
@@ -9254,13 +9171,6 @@
     <a:masterClrMapping/>
   </p:clrMapOvr>
   <p:transition/>
-  <p:timing>
-    <p:tnLst>
-      <p:par>
-        <p:cTn id="1" dur="indefinite" restart="never" nodeType="tmRoot"/>
-      </p:par>
-    </p:tnLst>
-  </p:timing>
 </p:sld>
 </file>
 
@@ -9343,43 +9253,43 @@
                   <a:buNone/>
                 </a:pPr>
                 <a:r>
-                  <a:rPr lang="en-US" sz="2400" b="1" u="sng" dirty="0" smtClean="0">
+                  <a:rPr lang="en-US" sz="2400" b="1" u="sng" dirty="0">
                     <a:latin typeface="Book Antiqua" panose="02040602050305030304" pitchFamily="18" charset="0"/>
                   </a:rPr>
                   <a:t>Iteration 1: </a:t>
                 </a:r>
                 <a:r>
-                  <a:rPr lang="en-US" sz="2400" dirty="0" smtClean="0">
+                  <a:rPr lang="en-US" sz="2400" dirty="0">
                     <a:latin typeface="Book Antiqua" panose="02040602050305030304" pitchFamily="18" charset="0"/>
                   </a:rPr>
                   <a:t> </a:t>
                 </a:r>
                 <a:r>
-                  <a:rPr lang="en-US" sz="2400" i="1" dirty="0" smtClean="0">
+                  <a:rPr lang="en-US" sz="2400" i="1" dirty="0">
                     <a:latin typeface="Book Antiqua" panose="02040602050305030304" pitchFamily="18" charset="0"/>
                   </a:rPr>
                   <a:t>x</a:t>
                 </a:r>
                 <a:r>
-                  <a:rPr lang="en-US" sz="2400" i="1" baseline="-25000" dirty="0" smtClean="0">
+                  <a:rPr lang="en-US" sz="2400" i="1" baseline="-25000" dirty="0">
                     <a:latin typeface="Book Antiqua" panose="02040602050305030304" pitchFamily="18" charset="0"/>
                   </a:rPr>
                   <a:t>1</a:t>
                 </a:r>
                 <a:r>
-                  <a:rPr lang="en-US" sz="2400" dirty="0" smtClean="0">
+                  <a:rPr lang="en-US" sz="2400" dirty="0">
                     <a:latin typeface="Book Antiqua" panose="02040602050305030304" pitchFamily="18" charset="0"/>
                   </a:rPr>
                   <a:t>=0.78, x</a:t>
                 </a:r>
                 <a:r>
-                  <a:rPr lang="en-US" sz="2400" baseline="-25000" dirty="0" smtClean="0">
+                  <a:rPr lang="en-US" sz="2400" baseline="-25000" dirty="0">
                     <a:latin typeface="Book Antiqua" panose="02040602050305030304" pitchFamily="18" charset="0"/>
                   </a:rPr>
                   <a:t>2</a:t>
                 </a:r>
                 <a:r>
-                  <a:rPr lang="en-US" sz="2400" dirty="0" smtClean="0">
+                  <a:rPr lang="en-US" sz="2400" dirty="0">
                     <a:latin typeface="Book Antiqua" panose="02040602050305030304" pitchFamily="18" charset="0"/>
                   </a:rPr>
                   <a:t>=0.69   y=1   </a:t>
@@ -9402,7 +9312,7 @@
                     </m:r>
                   </m:oMath>
                 </a14:m>
-                <a:endParaRPr lang="en-US" sz="2400" dirty="0" smtClean="0">
+                <a:endParaRPr lang="en-US" sz="2400" dirty="0">
                   <a:latin typeface="Book Antiqua" panose="02040602050305030304" pitchFamily="18" charset="0"/>
                 </a:endParaRPr>
               </a:p>
@@ -9411,7 +9321,7 @@
                   <a:buNone/>
                 </a:pPr>
                 <a:r>
-                  <a:rPr lang="en-US" sz="2400" dirty="0" smtClean="0"/>
+                  <a:rPr lang="en-US" sz="2400" dirty="0"/>
                   <a:t>z</a:t>
                 </a:r>
                 <a14:m>
@@ -9568,7 +9478,7 @@
                   </m:oMath>
                 </a14:m>
                 <a:r>
-                  <a:rPr lang="en-US" sz="2400" dirty="0" smtClean="0">
+                  <a:rPr lang="en-US" sz="2400" dirty="0">
                     <a:latin typeface="Book Antiqua" panose="02040602050305030304" pitchFamily="18" charset="0"/>
                   </a:rPr>
                   <a:t>         </a:t>
@@ -9823,7 +9733,7 @@
                     </m:oMath>
                   </m:oMathPara>
                 </a14:m>
-                <a:endParaRPr lang="en-US" sz="2400" b="0" dirty="0" smtClean="0">
+                <a:endParaRPr lang="en-US" sz="2400" b="0" dirty="0">
                   <a:latin typeface="Book Antiqua" panose="02040602050305030304" pitchFamily="18" charset="0"/>
                 </a:endParaRPr>
               </a:p>
@@ -10023,7 +9933,7 @@
                     </m:oMath>
                   </m:oMathPara>
                 </a14:m>
-                <a:endParaRPr lang="en-US" sz="2400" dirty="0" smtClean="0">
+                <a:endParaRPr lang="en-US" sz="2400" dirty="0">
                   <a:latin typeface="Book Antiqua" panose="02040602050305030304" pitchFamily="18" charset="0"/>
                 </a:endParaRPr>
               </a:p>
@@ -10219,7 +10129,7 @@
                 <a:pPr marL="0" indent="0" algn="just" fontAlgn="base">
                   <a:buNone/>
                 </a:pPr>
-                <a:endParaRPr lang="en-US" sz="2300" dirty="0" smtClean="0">
+                <a:endParaRPr lang="en-US" sz="2300" dirty="0">
                   <a:latin typeface="Book Antiqua" panose="02040602050305030304" pitchFamily="18" charset="0"/>
                 </a:endParaRPr>
               </a:p>
@@ -10227,7 +10137,7 @@
                 <a:pPr marL="0" indent="0" algn="just" fontAlgn="base">
                   <a:buNone/>
                 </a:pPr>
-                <a:endParaRPr lang="en-US" sz="2300" dirty="0" smtClean="0">
+                <a:endParaRPr lang="en-US" sz="2300" dirty="0">
                   <a:latin typeface="Book Antiqua" panose="02040602050305030304" pitchFamily="18" charset="0"/>
                 </a:endParaRPr>
               </a:p>
@@ -10236,7 +10146,7 @@
                   <a:buNone/>
                 </a:pPr>
                 <a:r>
-                  <a:rPr lang="en-US" sz="2800" dirty="0" smtClean="0">
+                  <a:rPr lang="en-US" sz="2800" dirty="0">
                     <a:latin typeface="Book Antiqua" panose="02040602050305030304" pitchFamily="18" charset="0"/>
                   </a:rPr>
                   <a:t>In the same way perform iteration 2, 3 and 4.</a:t>
@@ -10254,7 +10164,7 @@
                 <a:pPr marL="0" indent="0" algn="just" fontAlgn="base">
                   <a:buNone/>
                 </a:pPr>
-                <a:endParaRPr lang="en-US" sz="2600" b="0" dirty="0" smtClean="0">
+                <a:endParaRPr lang="en-US" sz="2600" b="0" dirty="0">
                   <a:latin typeface="Book Antiqua" panose="02040602050305030304" pitchFamily="18" charset="0"/>
                 </a:endParaRPr>
               </a:p>
@@ -10262,7 +10172,7 @@
                 <a:pPr marL="0" indent="0" algn="just" fontAlgn="base">
                   <a:buNone/>
                 </a:pPr>
-                <a:endParaRPr lang="en-US" sz="2600" dirty="0" smtClean="0">
+                <a:endParaRPr lang="en-US" sz="2600" dirty="0">
                   <a:latin typeface="Book Antiqua" panose="02040602050305030304" pitchFamily="18" charset="0"/>
                 </a:endParaRPr>
               </a:p>
@@ -10270,7 +10180,7 @@
                 <a:pPr marL="0" indent="0" algn="just" fontAlgn="base">
                   <a:buNone/>
                 </a:pPr>
-                <a:endParaRPr lang="en-US" sz="2600" dirty="0" smtClean="0">
+                <a:endParaRPr lang="en-US" sz="2600" dirty="0">
                   <a:latin typeface="Book Antiqua" panose="02040602050305030304" pitchFamily="18" charset="0"/>
                 </a:endParaRPr>
               </a:p>
@@ -10332,7 +10242,7 @@
           <a:p>
             <a:fld id="{6D9A578A-B03A-406E-BF6A-C885E41133C3}" type="datetime1">
               <a:rPr lang="en-US" smtClean="0"/>
-              <a:t>5/6/2025</a:t>
+              <a:t>6/29/2025</a:t>
             </a:fld>
             <a:endParaRPr lang="en-US"/>
           </a:p>
@@ -10354,10 +10264,9 @@
           <a:lstStyle/>
           <a:p>
             <a:r>
-              <a:rPr lang="en-US" smtClean="0"/>
+              <a:rPr lang="en-US"/>
               <a:t>By: Arjun Singh Saud</a:t>
             </a:r>
-            <a:endParaRPr lang="en-US"/>
           </a:p>
         </p:txBody>
       </p:sp>
@@ -10396,13 +10305,6 @@
     <a:masterClrMapping/>
   </p:clrMapOvr>
   <p:transition/>
-  <p:timing>
-    <p:tnLst>
-      <p:par>
-        <p:cTn id="1" dur="indefinite" restart="never" nodeType="tmRoot"/>
-      </p:par>
-    </p:tnLst>
-  </p:timing>
 </p:sld>
 </file>
 
@@ -10442,7 +10344,7 @@
           <a:p>
             <a:pPr eaLnBrk="1" hangingPunct="1"/>
             <a:r>
-              <a:rPr lang="en-US" altLang="en-US" sz="3600" b="1" dirty="0" smtClean="0">
+              <a:rPr lang="en-US" altLang="en-US" sz="3600" b="1" dirty="0">
                 <a:latin typeface="Book Antiqua" pitchFamily="18" charset="0"/>
               </a:rPr>
               <a:t>Linear Basis Function Models</a:t>
@@ -10472,44 +10374,17 @@
               <a:rPr lang="en-US" sz="2600" dirty="0">
                 <a:latin typeface="Book Antiqua" panose="02040602050305030304" pitchFamily="18" charset="0"/>
               </a:rPr>
-              <a:t>Given a supervised learning problem of using    inputs </a:t>
-            </a:r>
-            <a:r>
-              <a:rPr lang="en-US" sz="2600" dirty="0" smtClean="0">
-                <a:latin typeface="Book Antiqua" pitchFamily="18" charset="0"/>
-              </a:rPr>
-              <a:t>p </a:t>
-            </a:r>
-            <a:r>
-              <a:rPr lang="en-US" sz="2600" dirty="0">
-                <a:latin typeface="Book Antiqua" pitchFamily="18" charset="0"/>
-              </a:rPr>
-              <a:t>to predict a continuous target </a:t>
-            </a:r>
-            <a:r>
-              <a:rPr lang="en-US" sz="2600" dirty="0" smtClean="0">
-                <a:latin typeface="Book Antiqua" pitchFamily="18" charset="0"/>
-              </a:rPr>
-              <a:t>y, </a:t>
-            </a:r>
-            <a:r>
-              <a:rPr lang="en-US" sz="2600" dirty="0">
-                <a:latin typeface="Book Antiqua" pitchFamily="18" charset="0"/>
-              </a:rPr>
-              <a:t>the simplest model to use would be linear regression.  </a:t>
+              <a:t>Given a supervised learning problem of using    inputs p to predict a continuous target y, the simplest model to use would be linear regression.  </a:t>
             </a:r>
           </a:p>
           <a:p>
             <a:pPr marL="165100" indent="-165100" algn="just"/>
             <a:r>
               <a:rPr lang="en-US" sz="2600" dirty="0">
-                <a:latin typeface="Book Antiqua" pitchFamily="18" charset="0"/>
+                <a:latin typeface="Book Antiqua" panose="02040602050305030304" pitchFamily="18" charset="0"/>
               </a:rPr>
               <a:t>However, what if we know that the relationship between the inputs and the target is non-linear, but we are unsure of exactly what form this relationship has? </a:t>
             </a:r>
-            <a:endParaRPr lang="en-US" sz="2600" dirty="0" smtClean="0">
-              <a:latin typeface="Book Antiqua" pitchFamily="18" charset="0"/>
-            </a:endParaRPr>
           </a:p>
           <a:p>
             <a:pPr marL="165100" lvl="0" indent="-165100" algn="just"/>
@@ -10518,21 +10393,7 @@
                 <a:latin typeface="Book Antiqua" panose="02040602050305030304" pitchFamily="18" charset="0"/>
                 <a:cs typeface="Arial" panose="020B0604020202020204" pitchFamily="34" charset="0"/>
               </a:rPr>
-              <a:t>One way to overcome this problem is to use linear basis function models.  These models assume that the target is a linear combination of a set of </a:t>
-            </a:r>
-            <a:r>
-              <a:rPr lang="en-US" sz="2600" dirty="0" smtClean="0">
-                <a:latin typeface="Book Antiqua" panose="02040602050305030304" pitchFamily="18" charset="0"/>
-                <a:cs typeface="Arial" panose="020B0604020202020204" pitchFamily="34" charset="0"/>
-              </a:rPr>
-              <a:t>p+1 basis </a:t>
-            </a:r>
-            <a:r>
-              <a:rPr lang="en-US" sz="2600" dirty="0">
-                <a:latin typeface="Book Antiqua" panose="02040602050305030304" pitchFamily="18" charset="0"/>
-                <a:cs typeface="Arial" panose="020B0604020202020204" pitchFamily="34" charset="0"/>
-              </a:rPr>
-              <a:t>functions.</a:t>
+              <a:t>One way to overcome this problem is to use linear basis function models.  These models assume that the target is a linear combination of a set of p+1 basis functions.</a:t>
             </a:r>
             <a:r>
               <a:rPr lang="en-US" sz="2600" dirty="0">
@@ -10543,20 +10404,20 @@
           </a:p>
           <a:p>
             <a:pPr marL="165100" indent="-165100" algn="just"/>
-            <a:endParaRPr lang="en-US" sz="2600" dirty="0" smtClean="0">
-              <a:latin typeface="Book Antiqua" pitchFamily="18" charset="0"/>
+            <a:endParaRPr lang="en-US" sz="2600" dirty="0">
+              <a:latin typeface="Book Antiqua" panose="02040602050305030304" pitchFamily="18" charset="0"/>
             </a:endParaRPr>
           </a:p>
           <a:p>
             <a:pPr marL="165100" indent="-165100" algn="just"/>
             <a:endParaRPr lang="en-US" sz="2600" dirty="0">
-              <a:latin typeface="Book Antiqua" pitchFamily="18" charset="0"/>
+              <a:latin typeface="Book Antiqua" panose="02040602050305030304" pitchFamily="18" charset="0"/>
             </a:endParaRPr>
           </a:p>
           <a:p>
             <a:pPr marL="165100" indent="-165100" algn="just"/>
             <a:endParaRPr lang="en-US" sz="2600" dirty="0">
-              <a:latin typeface="Book Antiqua" pitchFamily="18" charset="0"/>
+              <a:latin typeface="Book Antiqua" panose="02040602050305030304" pitchFamily="18" charset="0"/>
             </a:endParaRPr>
           </a:p>
         </p:txBody>
@@ -10755,7 +10616,7 @@
           <a:p>
             <a:fld id="{471DAC61-A070-449B-BED9-D49216C3006B}" type="datetime1">
               <a:rPr lang="en-US" smtClean="0"/>
-              <a:t>5/6/2025</a:t>
+              <a:t>6/29/2025</a:t>
             </a:fld>
             <a:endParaRPr lang="en-US"/>
           </a:p>
@@ -10777,7 +10638,7 @@
           <a:lstStyle/>
           <a:p>
             <a:r>
-              <a:rPr lang="en-US" smtClean="0"/>
+              <a:rPr lang="en-US"/>
               <a:t>By: Arjun Singh Saud</a:t>
             </a:r>
             <a:endParaRPr lang="en-US" dirty="0"/>
@@ -10836,13 +10697,6 @@
     <a:masterClrMapping/>
   </p:clrMapOvr>
   <p:transition/>
-  <p:timing>
-    <p:tnLst>
-      <p:par>
-        <p:cTn id="1" dur="indefinite" restart="never" nodeType="tmRoot"/>
-      </p:par>
-    </p:tnLst>
-  </p:timing>
 </p:sld>
 </file>
 
@@ -10881,14 +10735,11 @@
           <a:lstStyle/>
           <a:p>
             <a:r>
-              <a:rPr lang="en-US" b="1" dirty="0" smtClean="0">
+              <a:rPr lang="en-US" b="1" dirty="0">
                 <a:latin typeface="Book Antiqua" pitchFamily="18" charset="0"/>
               </a:rPr>
               <a:t>Polynomial Curve Fitting</a:t>
             </a:r>
-            <a:endParaRPr lang="en-US" b="1" dirty="0">
-              <a:latin typeface="Book Antiqua" pitchFamily="18" charset="0"/>
-            </a:endParaRPr>
           </a:p>
         </p:txBody>
       </p:sp>
@@ -10918,46 +10769,28 @@
               <a:p>
                 <a:pPr algn="just" fontAlgn="base"/>
                 <a:r>
-                  <a:rPr lang="en-US" sz="2600" dirty="0" smtClean="0">
+                  <a:rPr lang="en-US" sz="2600" dirty="0">
                     <a:latin typeface="Book Antiqua" pitchFamily="18" charset="0"/>
                   </a:rPr>
-                  <a:t>Polynomial curve fitting </a:t>
+                  <a:t>Polynomial curve fitting is a form of regression analysis in which the relationship between the independent variables and dependent variables are modeled in the </a:t>
+                </a:r>
+                <a:r>
+                  <a:rPr lang="en-US" sz="2600" dirty="0" err="1">
+                    <a:latin typeface="Book Antiqua" pitchFamily="18" charset="0"/>
+                  </a:rPr>
+                  <a:t>m</a:t>
+                </a:r>
+                <a:r>
+                  <a:rPr lang="en-US" sz="2600" baseline="30000" dirty="0" err="1">
+                    <a:latin typeface="Book Antiqua" pitchFamily="18" charset="0"/>
+                  </a:rPr>
+                  <a:t>th</a:t>
                 </a:r>
                 <a:r>
                   <a:rPr lang="en-US" sz="2600" dirty="0">
                     <a:latin typeface="Book Antiqua" pitchFamily="18" charset="0"/>
                   </a:rPr>
-                  <a:t>is a form of regression analysis in which the relationship between the independent variables and dependent variables are modeled in the </a:t>
-                </a:r>
-                <a:r>
-                  <a:rPr lang="en-US" sz="2600" dirty="0" err="1" smtClean="0">
-                    <a:latin typeface="Book Antiqua" pitchFamily="18" charset="0"/>
-                  </a:rPr>
-                  <a:t>m</a:t>
-                </a:r>
-                <a:r>
-                  <a:rPr lang="en-US" sz="2600" baseline="30000" dirty="0" err="1" smtClean="0">
-                    <a:latin typeface="Book Antiqua" pitchFamily="18" charset="0"/>
-                  </a:rPr>
-                  <a:t>th</a:t>
-                </a:r>
-                <a:r>
-                  <a:rPr lang="en-US" sz="2600" dirty="0" smtClean="0">
-                    <a:latin typeface="Book Antiqua" pitchFamily="18" charset="0"/>
-                  </a:rPr>
-                  <a:t> </a:t>
-                </a:r>
-                <a:r>
-                  <a:rPr lang="en-US" sz="2600" dirty="0">
-                    <a:latin typeface="Book Antiqua" pitchFamily="18" charset="0"/>
-                  </a:rPr>
-                  <a:t>degree polynomial</a:t>
-                </a:r>
-                <a:r>
-                  <a:rPr lang="en-US" sz="2600" dirty="0" smtClean="0">
-                    <a:latin typeface="Book Antiqua" pitchFamily="18" charset="0"/>
-                  </a:rPr>
-                  <a:t>.</a:t>
+                  <a:t> degree polynomial.</a:t>
                 </a:r>
               </a:p>
               <a:p>
@@ -10966,13 +10799,7 @@
                   <a:rPr lang="en-US" sz="2600" dirty="0">
                     <a:latin typeface="Book Antiqua" pitchFamily="18" charset="0"/>
                   </a:rPr>
-                  <a:t>Polynomial Regression models are usually fit with the method of least squares</a:t>
-                </a:r>
-                <a:r>
-                  <a:rPr lang="en-US" sz="2600" dirty="0" smtClean="0">
-                    <a:latin typeface="Book Antiqua" pitchFamily="18" charset="0"/>
-                  </a:rPr>
-                  <a:t>.</a:t>
+                  <a:t>Polynomial Regression models are usually fit with the method of least squares.</a:t>
                 </a:r>
               </a:p>
               <a:p>
@@ -10981,13 +10808,7 @@
                   <a:rPr lang="en-US" sz="2600" dirty="0">
                     <a:latin typeface="Book Antiqua" pitchFamily="18" charset="0"/>
                   </a:rPr>
-                  <a:t>If we assume that the relationship is a linear one, then we can use </a:t>
-                </a:r>
-                <a:r>
-                  <a:rPr lang="en-US" sz="2600" dirty="0" smtClean="0">
-                    <a:latin typeface="Book Antiqua" pitchFamily="18" charset="0"/>
-                  </a:rPr>
-                  <a:t>linear equation given as:</a:t>
+                  <a:t>If we assume that the relationship is a linear one, then we can use linear equation given as:</a:t>
                 </a:r>
               </a:p>
               <a:p>
@@ -10995,7 +10816,7 @@
                   <a:buNone/>
                 </a:pPr>
                 <a:r>
-                  <a:rPr lang="en-US" sz="2600" dirty="0" smtClean="0">
+                  <a:rPr lang="en-US" sz="2600" dirty="0">
                     <a:latin typeface="Book Antiqua" pitchFamily="18" charset="0"/>
                   </a:rPr>
                   <a:t>     </a:t>
@@ -11078,7 +10899,7 @@
                     </m:r>
                   </m:oMath>
                 </a14:m>
-                <a:endParaRPr lang="en-US" sz="2600" dirty="0" smtClean="0">
+                <a:endParaRPr lang="en-US" sz="2600" dirty="0">
                   <a:latin typeface="Book Antiqua" pitchFamily="18" charset="0"/>
                 </a:endParaRPr>
               </a:p>
@@ -11140,7 +10961,7 @@
           <a:p>
             <a:fld id="{99DA44C3-A9E3-47AE-A8FD-E8FAD88F472D}" type="datetime1">
               <a:rPr lang="en-US" smtClean="0"/>
-              <a:t>5/6/2025</a:t>
+              <a:t>6/29/2025</a:t>
             </a:fld>
             <a:endParaRPr lang="en-US"/>
           </a:p>
@@ -11162,10 +10983,9 @@
           <a:lstStyle/>
           <a:p>
             <a:r>
-              <a:rPr lang="en-US" smtClean="0"/>
+              <a:rPr lang="en-US"/>
               <a:t>By: Arjun Singh Saud</a:t>
             </a:r>
-            <a:endParaRPr lang="en-US"/>
           </a:p>
         </p:txBody>
       </p:sp>
@@ -11204,13 +11024,6 @@
     <a:masterClrMapping/>
   </p:clrMapOvr>
   <p:transition/>
-  <p:timing>
-    <p:tnLst>
-      <p:par>
-        <p:cTn id="1" dur="indefinite" restart="never" nodeType="tmRoot"/>
-      </p:par>
-    </p:tnLst>
-  </p:timing>
 </p:sld>
 </file>
 
@@ -11250,7 +11063,7 @@
           <a:p>
             <a:pPr eaLnBrk="1" hangingPunct="1"/>
             <a:r>
-              <a:rPr lang="en-US" altLang="en-US" sz="3600" b="1" dirty="0" smtClean="0">
+              <a:rPr lang="en-US" altLang="en-US" sz="3600" b="1" dirty="0">
                 <a:latin typeface="Book Antiqua" pitchFamily="18" charset="0"/>
               </a:rPr>
               <a:t>Linear Basis Function Models</a:t>
@@ -11633,7 +11446,7 @@
                     </m:oMath>
                   </m:oMathPara>
                 </a14:m>
-                <a:endParaRPr lang="en-US" sz="2600" dirty="0" smtClean="0">
+                <a:endParaRPr lang="en-US" sz="2600" dirty="0">
                   <a:latin typeface="Book Antiqua" pitchFamily="18" charset="0"/>
                 </a:endParaRPr>
               </a:p>
@@ -11643,25 +11456,7 @@
                   <a:rPr lang="en-US" sz="2600" dirty="0">
                     <a:latin typeface="Book Antiqua" pitchFamily="18" charset="0"/>
                   </a:rPr>
-                  <a:t>This is a generalization of linear regression that essentially replaces each input with a function of the input.  </a:t>
-                </a:r>
-                <a:r>
-                  <a:rPr lang="en-US" sz="2600" dirty="0" smtClean="0">
-                    <a:latin typeface="Book Antiqua" pitchFamily="18" charset="0"/>
-                  </a:rPr>
-                  <a:t>A </a:t>
-                </a:r>
-                <a:r>
-                  <a:rPr lang="en-US" sz="2600" dirty="0">
-                    <a:latin typeface="Book Antiqua" pitchFamily="18" charset="0"/>
-                  </a:rPr>
-                  <a:t>linear basis function model that uses the identity function is just linear regression</a:t>
-                </a:r>
-                <a:r>
-                  <a:rPr lang="en-US" sz="2600" dirty="0" smtClean="0">
-                    <a:latin typeface="Book Antiqua" pitchFamily="18" charset="0"/>
-                  </a:rPr>
-                  <a:t>.</a:t>
+                  <a:t>This is a generalization of linear regression that essentially replaces each input with a function of the input.  A linear basis function model that uses the identity function is just linear regression.</a:t>
                 </a:r>
               </a:p>
               <a:p>
@@ -11670,31 +11465,7 @@
                   <a:rPr lang="en-US" sz="2800" dirty="0">
                     <a:latin typeface="Book Antiqua" panose="02040602050305030304" pitchFamily="18" charset="0"/>
                   </a:rPr>
-                  <a:t>The example of polynomial regression </a:t>
-                </a:r>
-                <a:r>
-                  <a:rPr lang="en-US" sz="2800" dirty="0" smtClean="0">
-                    <a:latin typeface="Book Antiqua" panose="02040602050305030304" pitchFamily="18" charset="0"/>
-                  </a:rPr>
-                  <a:t>is </a:t>
-                </a:r>
-                <a:r>
-                  <a:rPr lang="en-US" sz="2800" dirty="0">
-                    <a:latin typeface="Book Antiqua" panose="02040602050305030304" pitchFamily="18" charset="0"/>
-                  </a:rPr>
-                  <a:t>a </a:t>
-                </a:r>
-                <a:r>
-                  <a:rPr lang="en-US" sz="2800" dirty="0" smtClean="0">
-                    <a:latin typeface="Book Antiqua" panose="02040602050305030304" pitchFamily="18" charset="0"/>
-                  </a:rPr>
-                  <a:t>particular example </a:t>
-                </a:r>
-                <a:r>
-                  <a:rPr lang="en-US" sz="2800" dirty="0">
-                    <a:latin typeface="Book Antiqua" panose="02040602050305030304" pitchFamily="18" charset="0"/>
-                  </a:rPr>
-                  <a:t>of this model in which there is a single input variable </a:t>
+                  <a:t>The example of polynomial regression is a particular example of this model in which there is a single input variable </a:t>
                 </a:r>
                 <a:r>
                   <a:rPr lang="en-US" sz="2800" i="1" dirty="0">
@@ -11706,19 +11477,7 @@
                   <a:rPr lang="en-US" sz="2800" dirty="0">
                     <a:latin typeface="Book Antiqua" panose="02040602050305030304" pitchFamily="18" charset="0"/>
                   </a:rPr>
-                  <a:t>, and the basis </a:t>
-                </a:r>
-                <a:r>
-                  <a:rPr lang="en-US" sz="2800" dirty="0" smtClean="0">
-                    <a:latin typeface="Book Antiqua" panose="02040602050305030304" pitchFamily="18" charset="0"/>
-                  </a:rPr>
-                  <a:t>functions take </a:t>
-                </a:r>
-                <a:r>
-                  <a:rPr lang="en-US" sz="2800" dirty="0">
-                    <a:latin typeface="Book Antiqua" panose="02040602050305030304" pitchFamily="18" charset="0"/>
-                  </a:rPr>
-                  <a:t>the form of powers of </a:t>
+                  <a:t>, and the basis functions take the form of powers of </a:t>
                 </a:r>
                 <a:r>
                   <a:rPr lang="en-US" sz="2800" i="1" dirty="0">
@@ -11763,19 +11522,19 @@
                   <a:t>) = </a:t>
                 </a:r>
                 <a:r>
-                  <a:rPr lang="en-US" sz="2800" i="1" dirty="0" err="1" smtClean="0">
+                  <a:rPr lang="en-US" sz="2800" i="1" dirty="0" err="1">
                     <a:latin typeface="Book Antiqua" panose="02040602050305030304" pitchFamily="18" charset="0"/>
                   </a:rPr>
                   <a:t>x</a:t>
                 </a:r>
                 <a:r>
-                  <a:rPr lang="en-US" sz="2800" i="1" baseline="30000" dirty="0" err="1" smtClean="0">
+                  <a:rPr lang="en-US" sz="2800" i="1" baseline="30000" dirty="0" err="1">
                     <a:latin typeface="Book Antiqua" panose="02040602050305030304" pitchFamily="18" charset="0"/>
                   </a:rPr>
                   <a:t>j</a:t>
                 </a:r>
                 <a:r>
-                  <a:rPr lang="en-US" sz="2800" i="1" dirty="0" smtClean="0">
+                  <a:rPr lang="en-US" sz="2800" i="1" dirty="0">
                     <a:latin typeface="Book Antiqua" panose="02040602050305030304" pitchFamily="18" charset="0"/>
                   </a:rPr>
                   <a:t>.</a:t>
@@ -12015,7 +11774,7 @@
           <a:p>
             <a:fld id="{9D3816E4-8B6C-4D2E-B89C-908F866FF9A4}" type="datetime1">
               <a:rPr lang="en-US" smtClean="0"/>
-              <a:t>5/6/2025</a:t>
+              <a:t>6/29/2025</a:t>
             </a:fld>
             <a:endParaRPr lang="en-US"/>
           </a:p>
@@ -12037,7 +11796,7 @@
           <a:lstStyle/>
           <a:p>
             <a:r>
-              <a:rPr lang="en-US" smtClean="0"/>
+              <a:rPr lang="en-US"/>
               <a:t>By: Arjun Singh Saud</a:t>
             </a:r>
             <a:endParaRPr lang="en-US" dirty="0"/>
@@ -12096,13 +11855,6 @@
     <a:masterClrMapping/>
   </p:clrMapOvr>
   <p:transition/>
-  <p:timing>
-    <p:tnLst>
-      <p:par>
-        <p:cTn id="1" dur="indefinite" restart="never" nodeType="tmRoot"/>
-      </p:par>
-    </p:tnLst>
-  </p:timing>
 </p:sld>
 </file>
 
@@ -12142,7 +11894,7 @@
           <a:p>
             <a:pPr eaLnBrk="1" hangingPunct="1"/>
             <a:r>
-              <a:rPr lang="en-US" altLang="en-US" sz="3600" b="1" dirty="0" smtClean="0">
+              <a:rPr lang="en-US" altLang="en-US" sz="3600" b="1" dirty="0">
                 <a:latin typeface="Book Antiqua" pitchFamily="18" charset="0"/>
               </a:rPr>
               <a:t>Linear Basis Function Models</a:t>
@@ -12172,34 +11924,16 @@
               <a:rPr lang="en-US" sz="2800" dirty="0">
                 <a:latin typeface="Book Antiqua" panose="02040602050305030304" pitchFamily="18" charset="0"/>
               </a:rPr>
-              <a:t>There are many other possible choices for the basis functions, for </a:t>
+              <a:t>There are many other possible choices for the basis functions, for example.</a:t>
             </a:r>
-            <a:r>
-              <a:rPr lang="en-US" sz="2800" dirty="0" smtClean="0">
-                <a:latin typeface="Book Antiqua" panose="02040602050305030304" pitchFamily="18" charset="0"/>
-              </a:rPr>
-              <a:t>example.</a:t>
-            </a:r>
           </a:p>
           <a:p>
             <a:pPr algn="just"/>
-            <a:r>
-              <a:rPr lang="en-GB" sz="2800" dirty="0" smtClean="0">
-                <a:latin typeface="Book Antiqua" panose="02040602050305030304" pitchFamily="18" charset="0"/>
-              </a:rPr>
-              <a:t>Gaussian </a:t>
-            </a:r>
             <a:r>
               <a:rPr lang="en-GB" sz="2800" dirty="0">
                 <a:latin typeface="Book Antiqua" panose="02040602050305030304" pitchFamily="18" charset="0"/>
               </a:rPr>
-              <a:t>basis </a:t>
-            </a:r>
-            <a:r>
-              <a:rPr lang="en-GB" sz="2800" dirty="0" smtClean="0">
-                <a:latin typeface="Book Antiqua" panose="02040602050305030304" pitchFamily="18" charset="0"/>
-              </a:rPr>
-              <a:t>functions:</a:t>
+              <a:t>Gaussian basis functions:</a:t>
             </a:r>
           </a:p>
           <a:p>
@@ -12211,26 +11945,11 @@
           <a:p>
             <a:pPr algn="just"/>
             <a:r>
-              <a:rPr lang="en-GB" sz="2800" dirty="0" smtClean="0">
-                <a:latin typeface="Book Antiqua" panose="02040602050305030304" pitchFamily="18" charset="0"/>
-              </a:rPr>
-              <a:t>Sigmoidal </a:t>
-            </a:r>
-            <a:r>
               <a:rPr lang="en-GB" sz="2800" dirty="0">
                 <a:latin typeface="Book Antiqua" panose="02040602050305030304" pitchFamily="18" charset="0"/>
               </a:rPr>
-              <a:t>basis </a:t>
+              <a:t>Sigmoidal basis functions:</a:t>
             </a:r>
-            <a:r>
-              <a:rPr lang="en-GB" sz="2800" dirty="0" smtClean="0">
-                <a:latin typeface="Book Antiqua" panose="02040602050305030304" pitchFamily="18" charset="0"/>
-              </a:rPr>
-              <a:t>functions:</a:t>
-            </a:r>
-            <a:endParaRPr lang="en-GB" sz="2800" dirty="0">
-              <a:latin typeface="Book Antiqua" panose="02040602050305030304" pitchFamily="18" charset="0"/>
-            </a:endParaRPr>
           </a:p>
           <a:p>
             <a:pPr marL="0" indent="0"/>
@@ -12246,21 +11965,12 @@
               <a:rPr lang="en-GB" sz="2800" dirty="0">
                 <a:latin typeface="Book Antiqua" panose="02040602050305030304" pitchFamily="18" charset="0"/>
               </a:rPr>
-              <a:t> </a:t>
+              <a:t>     Where,</a:t>
             </a:r>
-            <a:r>
-              <a:rPr lang="en-GB" sz="2800" dirty="0" smtClean="0">
-                <a:latin typeface="Book Antiqua" panose="02040602050305030304" pitchFamily="18" charset="0"/>
-              </a:rPr>
-              <a:t>    Where,</a:t>
-            </a:r>
-            <a:endParaRPr lang="en-GB" sz="2800" dirty="0">
-              <a:latin typeface="Book Antiqua" panose="02040602050305030304" pitchFamily="18" charset="0"/>
-            </a:endParaRPr>
           </a:p>
           <a:p>
             <a:pPr algn="just"/>
-            <a:endParaRPr lang="en-US" sz="2800" dirty="0" smtClean="0">
+            <a:endParaRPr lang="en-US" sz="2800" dirty="0">
               <a:latin typeface="Book Antiqua" panose="02040602050305030304" pitchFamily="18" charset="0"/>
             </a:endParaRPr>
           </a:p>
@@ -12460,7 +12170,7 @@
           <a:p>
             <a:fld id="{5EA7B7B9-4224-450A-8159-0401AA8E991A}" type="datetime1">
               <a:rPr lang="en-US" smtClean="0"/>
-              <a:t>5/6/2025</a:t>
+              <a:t>6/29/2025</a:t>
             </a:fld>
             <a:endParaRPr lang="en-US"/>
           </a:p>
@@ -12482,7 +12192,7 @@
           <a:lstStyle/>
           <a:p>
             <a:r>
-              <a:rPr lang="en-US" smtClean="0"/>
+              <a:rPr lang="en-US"/>
               <a:t>By: Arjun Singh Saud</a:t>
             </a:r>
             <a:endParaRPr lang="en-US" dirty="0"/>
@@ -12699,13 +12409,6 @@
     <a:masterClrMapping/>
   </p:clrMapOvr>
   <p:transition/>
-  <p:timing>
-    <p:tnLst>
-      <p:par>
-        <p:cTn id="1" dur="indefinite" restart="never" nodeType="tmRoot"/>
-      </p:par>
-    </p:tnLst>
-  </p:timing>
 </p:sld>
 </file>
 
@@ -12744,14 +12447,11 @@
           <a:lstStyle/>
           <a:p>
             <a:r>
-              <a:rPr lang="en-US" b="1" dirty="0" smtClean="0">
+              <a:rPr lang="en-US" b="1" dirty="0">
                 <a:latin typeface="Book Antiqua" pitchFamily="18" charset="0"/>
               </a:rPr>
               <a:t>Polynomial Curve Fitting</a:t>
             </a:r>
-            <a:endParaRPr lang="en-US" b="1" dirty="0">
-              <a:latin typeface="Book Antiqua" pitchFamily="18" charset="0"/>
-            </a:endParaRPr>
           </a:p>
         </p:txBody>
       </p:sp>
@@ -12781,22 +12481,10 @@
               <a:p>
                 <a:pPr algn="just" fontAlgn="base"/>
                 <a:r>
-                  <a:rPr lang="en-US" sz="2800" dirty="0" smtClean="0">
-                    <a:latin typeface="Book Antiqua" panose="02040602050305030304" pitchFamily="18" charset="0"/>
-                  </a:rPr>
-                  <a:t>However, if </a:t>
-                </a:r>
-                <a:r>
                   <a:rPr lang="en-US" sz="2800" dirty="0">
                     <a:latin typeface="Book Antiqua" panose="02040602050305030304" pitchFamily="18" charset="0"/>
                   </a:rPr>
-                  <a:t>we assume that the relationship is </a:t>
-                </a:r>
-                <a:r>
-                  <a:rPr lang="en-US" sz="2800" dirty="0" smtClean="0">
-                    <a:latin typeface="Book Antiqua" panose="02040602050305030304" pitchFamily="18" charset="0"/>
-                  </a:rPr>
-                  <a:t>non-linear, we can use polynomial of more than degree one given as below.</a:t>
+                  <a:t>However, if we assume that the relationship is non-linear, we can use polynomial of more than degree one given as below.</a:t>
                 </a:r>
               </a:p>
               <a:p>
@@ -12807,13 +12495,7 @@
                   <a:rPr lang="en-US" sz="2800" dirty="0">
                     <a:latin typeface="Book Antiqua" panose="02040602050305030304" pitchFamily="18" charset="0"/>
                   </a:rPr>
-                  <a:t> </a:t>
-                </a:r>
-                <a:r>
-                  <a:rPr lang="en-US" sz="2800" dirty="0" smtClean="0">
-                    <a:latin typeface="Book Antiqua" panose="02040602050305030304" pitchFamily="18" charset="0"/>
-                  </a:rPr>
-                  <a:t>   	 </a:t>
+                  <a:t>    	 </a:t>
                 </a:r>
                 <a14:m>
                   <m:oMath xmlns:m="http://schemas.openxmlformats.org/officeDocument/2006/math">
@@ -13005,44 +12687,44 @@
                     </m:sSup>
                   </m:oMath>
                 </a14:m>
-                <a:endParaRPr lang="en-US" sz="2600" dirty="0" smtClean="0">
+                <a:endParaRPr lang="en-US" sz="2600" dirty="0">
                   <a:latin typeface="Book Antiqua" panose="02040602050305030304" pitchFamily="18" charset="0"/>
                 </a:endParaRPr>
               </a:p>
               <a:p>
                 <a:pPr algn="just" fontAlgn="base"/>
                 <a:r>
-                  <a:rPr lang="en-US" sz="2600" dirty="0" smtClean="0">
+                  <a:rPr lang="en-US" sz="2600" dirty="0">
                     <a:latin typeface="Book Antiqua" panose="02040602050305030304" pitchFamily="18" charset="0"/>
                   </a:rPr>
                   <a:t>Here, </a:t>
                 </a:r>
                 <a:r>
-                  <a:rPr lang="en-US" sz="2600" dirty="0" err="1" smtClean="0">
+                  <a:rPr lang="en-US" sz="2600" dirty="0" err="1">
                     <a:latin typeface="Book Antiqua" panose="02040602050305030304" pitchFamily="18" charset="0"/>
                   </a:rPr>
                   <a:t>w</a:t>
                 </a:r>
                 <a:r>
-                  <a:rPr lang="en-US" sz="2600" baseline="-25000" dirty="0" err="1" smtClean="0">
+                  <a:rPr lang="en-US" sz="2600" baseline="-25000" dirty="0" err="1">
                     <a:latin typeface="Book Antiqua" panose="02040602050305030304" pitchFamily="18" charset="0"/>
                   </a:rPr>
                   <a:t>i</a:t>
                 </a:r>
                 <a:r>
-                  <a:rPr lang="en-US" sz="2600" dirty="0" smtClean="0">
+                  <a:rPr lang="en-US" sz="2600" dirty="0">
                     <a:latin typeface="Book Antiqua" panose="02040602050305030304" pitchFamily="18" charset="0"/>
                   </a:rPr>
                   <a:t>, </a:t>
                 </a:r>
                 <a:r>
-                  <a:rPr lang="en-US" sz="2600" dirty="0" err="1" smtClean="0">
+                  <a:rPr lang="en-US" sz="2600" dirty="0" err="1">
                     <a:latin typeface="Book Antiqua" panose="02040602050305030304" pitchFamily="18" charset="0"/>
                   </a:rPr>
                   <a:t>i</a:t>
                 </a:r>
                 <a:r>
-                  <a:rPr lang="en-US" sz="2600" dirty="0" smtClean="0">
+                  <a:rPr lang="en-US" sz="2600" dirty="0">
                     <a:latin typeface="Book Antiqua" panose="02040602050305030304" pitchFamily="18" charset="0"/>
                   </a:rPr>
                   <a:t>=0,1…..m are coefficients of polynomial that needs to be determined minimizing mean squared error.  Error function for the n data points is given by: </a:t>
@@ -13236,7 +12918,7 @@
           <a:p>
             <a:fld id="{3116E5EF-7D13-46AB-AA0D-7248BC332C1D}" type="datetime1">
               <a:rPr lang="en-US" smtClean="0"/>
-              <a:t>5/6/2025</a:t>
+              <a:t>6/29/2025</a:t>
             </a:fld>
             <a:endParaRPr lang="en-US"/>
           </a:p>
@@ -13258,10 +12940,9 @@
           <a:lstStyle/>
           <a:p>
             <a:r>
-              <a:rPr lang="en-US" smtClean="0"/>
+              <a:rPr lang="en-US"/>
               <a:t>By: Arjun Singh Saud</a:t>
             </a:r>
-            <a:endParaRPr lang="en-US"/>
           </a:p>
         </p:txBody>
       </p:sp>
@@ -13300,13 +12981,6 @@
     <a:masterClrMapping/>
   </p:clrMapOvr>
   <p:transition/>
-  <p:timing>
-    <p:tnLst>
-      <p:par>
-        <p:cTn id="1" dur="indefinite" restart="never" nodeType="tmRoot"/>
-      </p:par>
-    </p:tnLst>
-  </p:timing>
 </p:sld>
 </file>
 
@@ -13345,14 +13019,11 @@
           <a:lstStyle/>
           <a:p>
             <a:r>
-              <a:rPr lang="en-US" b="1" dirty="0" smtClean="0">
+              <a:rPr lang="en-US" b="1" dirty="0">
                 <a:latin typeface="Book Antiqua" pitchFamily="18" charset="0"/>
               </a:rPr>
               <a:t>Polynomial Curve Fitting</a:t>
             </a:r>
-            <a:endParaRPr lang="en-US" b="1" dirty="0">
-              <a:latin typeface="Book Antiqua" pitchFamily="18" charset="0"/>
-            </a:endParaRPr>
           </a:p>
         </p:txBody>
       </p:sp>
@@ -13755,14 +13426,14 @@
                     </m:oMath>
                   </m:oMathPara>
                 </a14:m>
-                <a:endParaRPr lang="en-US" sz="2800" dirty="0" smtClean="0">
+                <a:endParaRPr lang="en-US" sz="2800" dirty="0">
                   <a:latin typeface="Book Antiqua" panose="02040602050305030304" pitchFamily="18" charset="0"/>
                 </a:endParaRPr>
               </a:p>
               <a:p>
                 <a:pPr algn="just" fontAlgn="base"/>
                 <a:r>
-                  <a:rPr lang="en-US" sz="2600" dirty="0" smtClean="0">
+                  <a:rPr lang="en-US" sz="2600" dirty="0">
                     <a:latin typeface="Book Antiqua" panose="02040602050305030304" pitchFamily="18" charset="0"/>
                   </a:rPr>
                   <a:t>Now, coefficients can be determined or  updated using gradient decent method as below.</a:t>
@@ -14278,7 +13949,7 @@
                     </m:oMath>
                   </m:oMathPara>
                 </a14:m>
-                <a:endParaRPr lang="en-US" sz="2600" dirty="0" smtClean="0">
+                <a:endParaRPr lang="en-US" sz="2600" dirty="0">
                   <a:latin typeface="Book Antiqua" panose="02040602050305030304" pitchFamily="18" charset="0"/>
                 </a:endParaRPr>
               </a:p>
@@ -14286,7 +13957,7 @@
                 <a:pPr marL="0" indent="0" algn="just" fontAlgn="base">
                   <a:buNone/>
                 </a:pPr>
-                <a:endParaRPr lang="en-US" sz="2600" dirty="0" smtClean="0">
+                <a:endParaRPr lang="en-US" sz="2600" dirty="0">
                   <a:latin typeface="Book Antiqua" panose="02040602050305030304" pitchFamily="18" charset="0"/>
                 </a:endParaRPr>
               </a:p>
@@ -14294,7 +13965,7 @@
                 <a:pPr marL="0" indent="0" algn="just" fontAlgn="base">
                   <a:buNone/>
                 </a:pPr>
-                <a:endParaRPr lang="en-US" sz="2600" dirty="0" smtClean="0">
+                <a:endParaRPr lang="en-US" sz="2600" dirty="0">
                   <a:latin typeface="Book Antiqua" panose="02040602050305030304" pitchFamily="18" charset="0"/>
                 </a:endParaRPr>
               </a:p>
@@ -14302,7 +13973,7 @@
                 <a:pPr marL="0" indent="0" algn="just" fontAlgn="base">
                   <a:buNone/>
                 </a:pPr>
-                <a:endParaRPr lang="en-US" sz="2600" dirty="0" smtClean="0">
+                <a:endParaRPr lang="en-US" sz="2600" dirty="0">
                   <a:latin typeface="Book Antiqua" panose="02040602050305030304" pitchFamily="18" charset="0"/>
                 </a:endParaRPr>
               </a:p>
@@ -14310,7 +13981,7 @@
                 <a:pPr marL="0" indent="0" algn="just" fontAlgn="base">
                   <a:buNone/>
                 </a:pPr>
-                <a:endParaRPr lang="en-US" sz="2600" dirty="0" smtClean="0">
+                <a:endParaRPr lang="en-US" sz="2600" dirty="0">
                   <a:latin typeface="Book Antiqua" panose="02040602050305030304" pitchFamily="18" charset="0"/>
                 </a:endParaRPr>
               </a:p>
@@ -14378,7 +14049,7 @@
           <a:p>
             <a:fld id="{49F29FCB-2791-4D05-AF18-45BD19C0DDB4}" type="datetime1">
               <a:rPr lang="en-US" smtClean="0"/>
-              <a:t>5/6/2025</a:t>
+              <a:t>6/29/2025</a:t>
             </a:fld>
             <a:endParaRPr lang="en-US"/>
           </a:p>
@@ -14400,10 +14071,9 @@
           <a:lstStyle/>
           <a:p>
             <a:r>
-              <a:rPr lang="en-US" smtClean="0"/>
+              <a:rPr lang="en-US"/>
               <a:t>By: Arjun Singh Saud</a:t>
             </a:r>
-            <a:endParaRPr lang="en-US"/>
           </a:p>
         </p:txBody>
       </p:sp>
@@ -14442,13 +14112,6 @@
     <a:masterClrMapping/>
   </p:clrMapOvr>
   <p:transition/>
-  <p:timing>
-    <p:tnLst>
-      <p:par>
-        <p:cTn id="1" dur="indefinite" restart="never" nodeType="tmRoot"/>
-      </p:par>
-    </p:tnLst>
-  </p:timing>
 </p:sld>
 </file>
 
@@ -14487,14 +14150,11 @@
           <a:lstStyle/>
           <a:p>
             <a:r>
-              <a:rPr lang="en-US" b="1" dirty="0" smtClean="0">
+              <a:rPr lang="en-US" b="1" dirty="0">
                 <a:latin typeface="Book Antiqua" pitchFamily="18" charset="0"/>
               </a:rPr>
               <a:t>Polynomial Curve Fitting</a:t>
             </a:r>
-            <a:endParaRPr lang="en-US" b="1" dirty="0">
-              <a:latin typeface="Book Antiqua" pitchFamily="18" charset="0"/>
-            </a:endParaRPr>
           </a:p>
         </p:txBody>
       </p:sp>
@@ -14512,7 +14172,7 @@
             </p:nvSpPr>
             <p:spPr>
               <a:xfrm>
-                <a:off x="228600" y="1295400"/>
+                <a:off x="16412" y="1273224"/>
                 <a:ext cx="8763000" cy="5105400"/>
               </a:xfrm>
             </p:spPr>
@@ -15031,32 +14691,41 @@
                       <m:sSub>
                         <m:sSubPr>
                           <m:ctrlPr>
-                            <a:rPr lang="en-US" sz="2800" i="1" smtClean="0">
+                            <a:rPr lang="en-US" sz="2800" b="1" i="1" smtClean="0">
+                              <a:solidFill>
+                                <a:srgbClr val="00B050"/>
+                              </a:solidFill>
                               <a:latin typeface="Cambria Math" panose="02040503050406030204" pitchFamily="18" charset="0"/>
                             </a:rPr>
                           </m:ctrlPr>
                         </m:sSubPr>
                         <m:e>
                           <m:r>
-                            <a:rPr lang="en-US" sz="2800" b="0" i="1" smtClean="0">
-                              <a:latin typeface="Cambria Math" panose="02040503050406030204" pitchFamily="18" charset="0"/>
-                            </a:rPr>
-                            <m:t>𝑥</m:t>
+                            <a:rPr lang="en-US" sz="2800" b="1" i="1" smtClean="0">
+                              <a:solidFill>
+                                <a:srgbClr val="00B050"/>
+                              </a:solidFill>
+                              <a:latin typeface="Cambria Math" panose="02040503050406030204" pitchFamily="18" charset="0"/>
+                            </a:rPr>
+                            <m:t>𝒙</m:t>
                           </m:r>
                         </m:e>
                         <m:sub>
                           <m:r>
-                            <a:rPr lang="en-US" sz="2800" b="0" i="1" smtClean="0">
-                              <a:latin typeface="Cambria Math" panose="02040503050406030204" pitchFamily="18" charset="0"/>
-                            </a:rPr>
-                            <m:t>𝑖</m:t>
+                            <a:rPr lang="en-US" sz="2800" b="1" i="1" smtClean="0">
+                              <a:solidFill>
+                                <a:srgbClr val="00B050"/>
+                              </a:solidFill>
+                              <a:latin typeface="Cambria Math" panose="02040503050406030204" pitchFamily="18" charset="0"/>
+                            </a:rPr>
+                            <m:t>𝒊</m:t>
                           </m:r>
                         </m:sub>
                       </m:sSub>
                     </m:oMath>
                   </m:oMathPara>
                 </a14:m>
-                <a:endParaRPr lang="en-US" sz="2600" dirty="0" smtClean="0">
+                <a:endParaRPr lang="en-US" sz="2600" b="1" dirty="0">
                   <a:latin typeface="Book Antiqua" panose="02040602050305030304" pitchFamily="18" charset="0"/>
                 </a:endParaRPr>
               </a:p>
@@ -15064,7 +14733,7 @@
                 <a:pPr marL="0" indent="0" algn="just" fontAlgn="base">
                   <a:buNone/>
                 </a:pPr>
-                <a:endParaRPr lang="en-US" sz="2600" dirty="0" smtClean="0">
+                <a:endParaRPr lang="en-US" sz="2600" dirty="0">
                   <a:latin typeface="Book Antiqua" panose="02040602050305030304" pitchFamily="18" charset="0"/>
                 </a:endParaRPr>
               </a:p>
@@ -15578,40 +15247,52 @@
                       <m:sSubSup>
                         <m:sSubSupPr>
                           <m:ctrlPr>
-                            <a:rPr lang="en-US" sz="2700" i="1" smtClean="0">
+                            <a:rPr lang="en-US" sz="2700" b="1" i="1" smtClean="0">
+                              <a:solidFill>
+                                <a:srgbClr val="00B050"/>
+                              </a:solidFill>
                               <a:latin typeface="Cambria Math" panose="02040503050406030204" pitchFamily="18" charset="0"/>
                             </a:rPr>
                           </m:ctrlPr>
                         </m:sSubSupPr>
                         <m:e>
                           <m:r>
-                            <a:rPr lang="en-US" sz="2700" b="0" i="1" smtClean="0">
-                              <a:latin typeface="Cambria Math" panose="02040503050406030204" pitchFamily="18" charset="0"/>
-                            </a:rPr>
-                            <m:t>𝑥</m:t>
+                            <a:rPr lang="en-US" sz="2700" b="1" i="1" smtClean="0">
+                              <a:solidFill>
+                                <a:srgbClr val="00B050"/>
+                              </a:solidFill>
+                              <a:latin typeface="Cambria Math" panose="02040503050406030204" pitchFamily="18" charset="0"/>
+                            </a:rPr>
+                            <m:t>𝒙</m:t>
                           </m:r>
                         </m:e>
                         <m:sub>
                           <m:r>
-                            <a:rPr lang="en-US" sz="2700" b="0" i="1" smtClean="0">
-                              <a:latin typeface="Cambria Math" panose="02040503050406030204" pitchFamily="18" charset="0"/>
-                            </a:rPr>
-                            <m:t>𝑖</m:t>
+                            <a:rPr lang="en-US" sz="2700" b="1" i="1" smtClean="0">
+                              <a:solidFill>
+                                <a:srgbClr val="00B050"/>
+                              </a:solidFill>
+                              <a:latin typeface="Cambria Math" panose="02040503050406030204" pitchFamily="18" charset="0"/>
+                            </a:rPr>
+                            <m:t>𝒊</m:t>
                           </m:r>
                         </m:sub>
                         <m:sup>
                           <m:r>
-                            <a:rPr lang="en-US" sz="2700" b="0" i="1" smtClean="0">
-                              <a:latin typeface="Cambria Math" panose="02040503050406030204" pitchFamily="18" charset="0"/>
-                            </a:rPr>
-                            <m:t>2</m:t>
+                            <a:rPr lang="en-US" sz="2700" b="1" i="1" smtClean="0">
+                              <a:solidFill>
+                                <a:srgbClr val="00B050"/>
+                              </a:solidFill>
+                              <a:latin typeface="Cambria Math" panose="02040503050406030204" pitchFamily="18" charset="0"/>
+                            </a:rPr>
+                            <m:t>𝟐</m:t>
                           </m:r>
                         </m:sup>
                       </m:sSubSup>
                     </m:oMath>
                   </m:oMathPara>
                 </a14:m>
-                <a:endParaRPr lang="en-US" sz="2700" dirty="0" smtClean="0">
+                <a:endParaRPr lang="en-US" sz="2700" b="1" dirty="0">
                   <a:latin typeface="Book Antiqua" panose="02040602050305030304" pitchFamily="18" charset="0"/>
                 </a:endParaRPr>
               </a:p>
@@ -15620,7 +15301,7 @@
                   <a:buNone/>
                 </a:pPr>
                 <a:r>
-                  <a:rPr lang="en-US" sz="2600" dirty="0" smtClean="0">
+                  <a:rPr lang="en-US" sz="2600" dirty="0">
                     <a:latin typeface="Book Antiqua" panose="02040602050305030304" pitchFamily="18" charset="0"/>
                   </a:rPr>
                   <a:t>So on</a:t>
@@ -15630,7 +15311,7 @@
                 <a:pPr marL="0" indent="0" algn="just" fontAlgn="base">
                   <a:buNone/>
                 </a:pPr>
-                <a:endParaRPr lang="en-US" sz="2600" dirty="0" smtClean="0">
+                <a:endParaRPr lang="en-US" sz="2600" dirty="0">
                   <a:latin typeface="Book Antiqua" panose="02040602050305030304" pitchFamily="18" charset="0"/>
                 </a:endParaRPr>
               </a:p>
@@ -15638,7 +15319,7 @@
                 <a:pPr marL="0" indent="0" algn="just" fontAlgn="base">
                   <a:buNone/>
                 </a:pPr>
-                <a:endParaRPr lang="en-US" sz="2600" dirty="0" smtClean="0">
+                <a:endParaRPr lang="en-US" sz="2600" dirty="0">
                   <a:latin typeface="Book Antiqua" panose="02040602050305030304" pitchFamily="18" charset="0"/>
                 </a:endParaRPr>
               </a:p>
@@ -15664,10 +15345,10 @@
             </p:nvSpPr>
             <p:spPr>
               <a:xfrm>
-                <a:off x="228600" y="1295400"/>
+                <a:off x="16412" y="1273224"/>
                 <a:ext cx="8763000" cy="5105400"/>
               </a:xfrm>
-              <a:blipFill rotWithShape="0">
+              <a:blipFill>
                 <a:blip r:embed="rId2"/>
                 <a:stretch>
                   <a:fillRect l="-1253"/>
@@ -15706,7 +15387,7 @@
           <a:p>
             <a:fld id="{4AE3C0E7-51C8-4717-9E03-AAE07F3AECE3}" type="datetime1">
               <a:rPr lang="en-US" smtClean="0"/>
-              <a:t>5/6/2025</a:t>
+              <a:t>6/29/2025</a:t>
             </a:fld>
             <a:endParaRPr lang="en-US"/>
           </a:p>
@@ -15728,10 +15409,9 @@
           <a:lstStyle/>
           <a:p>
             <a:r>
-              <a:rPr lang="en-US" smtClean="0"/>
+              <a:rPr lang="en-US"/>
               <a:t>By: Arjun Singh Saud</a:t>
             </a:r>
-            <a:endParaRPr lang="en-US"/>
           </a:p>
         </p:txBody>
       </p:sp>
@@ -15770,13 +15450,6 @@
     <a:masterClrMapping/>
   </p:clrMapOvr>
   <p:transition/>
-  <p:timing>
-    <p:tnLst>
-      <p:par>
-        <p:cTn id="1" dur="indefinite" restart="never" nodeType="tmRoot"/>
-      </p:par>
-    </p:tnLst>
-  </p:timing>
 </p:sld>
 </file>
 
@@ -15815,14 +15488,11 @@
           <a:lstStyle/>
           <a:p>
             <a:r>
-              <a:rPr lang="en-US" b="1" dirty="0" smtClean="0">
+              <a:rPr lang="en-US" b="1" dirty="0">
                 <a:latin typeface="Book Antiqua" pitchFamily="18" charset="0"/>
               </a:rPr>
               <a:t>Polynomial Curve Fitting</a:t>
             </a:r>
-            <a:endParaRPr lang="en-US" b="1" dirty="0">
-              <a:latin typeface="Book Antiqua" pitchFamily="18" charset="0"/>
-            </a:endParaRPr>
           </a:p>
         </p:txBody>
       </p:sp>
@@ -15852,28 +15522,16 @@
               <a:p>
                 <a:pPr algn="just"/>
                 <a:r>
-                  <a:rPr lang="en-US" sz="2800" b="1" i="1" dirty="0" smtClean="0">
+                  <a:rPr lang="en-US" sz="2800" b="1" i="1" dirty="0">
                     <a:latin typeface="Book Antiqua" panose="02040602050305030304" pitchFamily="18" charset="0"/>
                   </a:rPr>
                   <a:t>Example: </a:t>
                 </a:r>
                 <a:r>
-                  <a:rPr lang="en-US" sz="2800" dirty="0" smtClean="0">
-                    <a:latin typeface="Book Antiqua" panose="02040602050305030304" pitchFamily="18" charset="0"/>
-                  </a:rPr>
-                  <a:t>Fit </a:t>
-                </a:r>
-                <a:r>
                   <a:rPr lang="en-US" sz="2800" dirty="0">
                     <a:latin typeface="Book Antiqua" panose="02040602050305030304" pitchFamily="18" charset="0"/>
                   </a:rPr>
-                  <a:t>the quadratic curve through the following </a:t>
-                </a:r>
-                <a:r>
-                  <a:rPr lang="en-US" sz="2800" dirty="0" smtClean="0">
-                    <a:latin typeface="Book Antiqua" panose="02040602050305030304" pitchFamily="18" charset="0"/>
-                  </a:rPr>
-                  <a:t>data. Show one epoch of computation.</a:t>
+                  <a:t>Fit the quadratic curve through the following data. Show one epoch of computation.</a:t>
                 </a:r>
               </a:p>
               <a:p>
@@ -15886,7 +15544,7 @@
                 <a:pPr marL="0" indent="0" algn="just" fontAlgn="base">
                   <a:buNone/>
                 </a:pPr>
-                <a:endParaRPr lang="en-US" sz="2600" dirty="0" smtClean="0">
+                <a:endParaRPr lang="en-US" sz="2600" dirty="0">
                   <a:latin typeface="Book Antiqua" panose="02040602050305030304" pitchFamily="18" charset="0"/>
                 </a:endParaRPr>
               </a:p>
@@ -15895,7 +15553,7 @@
                   <a:buNone/>
                 </a:pPr>
                 <a:r>
-                  <a:rPr lang="en-US" sz="2600" b="1" u="sng" dirty="0" smtClean="0">
+                  <a:rPr lang="en-US" sz="2600" b="1" u="sng" dirty="0">
                     <a:latin typeface="Book Antiqua" panose="02040602050305030304" pitchFamily="18" charset="0"/>
                   </a:rPr>
                   <a:t>Solution</a:t>
@@ -15906,7 +15564,7 @@
                   <a:buNone/>
                 </a:pPr>
                 <a:r>
-                  <a:rPr lang="en-US" sz="2600" dirty="0" smtClean="0">
+                  <a:rPr lang="en-US" sz="2600" dirty="0">
                     <a:latin typeface="Book Antiqua" panose="02040602050305030304" pitchFamily="18" charset="0"/>
                   </a:rPr>
                   <a:t>General form of quadratic equation is: </a:t>
@@ -16045,7 +15703,7 @@
                     </m:sSup>
                   </m:oMath>
                 </a14:m>
-                <a:endParaRPr lang="en-US" sz="2600" dirty="0" smtClean="0">
+                <a:endParaRPr lang="en-US" sz="2600" dirty="0">
                   <a:latin typeface="Book Antiqua" panose="02040602050305030304" pitchFamily="18" charset="0"/>
                 </a:endParaRPr>
               </a:p>
@@ -16054,7 +15712,7 @@
                   <a:buNone/>
                 </a:pPr>
                 <a:r>
-                  <a:rPr lang="en-US" sz="2600" dirty="0" smtClean="0">
+                  <a:rPr lang="en-US" sz="2600" dirty="0">
                     <a:latin typeface="Book Antiqua" panose="02040602050305030304" pitchFamily="18" charset="0"/>
                   </a:rPr>
                   <a:t>Let us assume that initial values of parameters are:</a:t>
@@ -16166,7 +15824,7 @@
                     </m:oMath>
                   </m:oMathPara>
                 </a14:m>
-                <a:endParaRPr lang="en-US" sz="2600" dirty="0" smtClean="0">
+                <a:endParaRPr lang="en-US" sz="2600" dirty="0">
                   <a:latin typeface="Book Antiqua" panose="02040602050305030304" pitchFamily="18" charset="0"/>
                 </a:endParaRPr>
               </a:p>
@@ -16244,11 +15902,41 @@
                 <a:tableStyleId>{5C22544A-7EE6-4342-B048-85BDC9FD1C3A}</a:tableStyleId>
               </a:tblPr>
               <a:tblGrid>
-                <a:gridCol w="660082"/>
-                <a:gridCol w="940118"/>
-                <a:gridCol w="1143001"/>
-                <a:gridCol w="1066800"/>
-                <a:gridCol w="990602"/>
+                <a:gridCol w="660082">
+                  <a:extLst>
+                    <a:ext uri="{9D8B030D-6E8A-4147-A177-3AD203B41FA5}">
+                      <a16:colId xmlns:a16="http://schemas.microsoft.com/office/drawing/2014/main" val="20000"/>
+                    </a:ext>
+                  </a:extLst>
+                </a:gridCol>
+                <a:gridCol w="940118">
+                  <a:extLst>
+                    <a:ext uri="{9D8B030D-6E8A-4147-A177-3AD203B41FA5}">
+                      <a16:colId xmlns:a16="http://schemas.microsoft.com/office/drawing/2014/main" val="20001"/>
+                    </a:ext>
+                  </a:extLst>
+                </a:gridCol>
+                <a:gridCol w="1143001">
+                  <a:extLst>
+                    <a:ext uri="{9D8B030D-6E8A-4147-A177-3AD203B41FA5}">
+                      <a16:colId xmlns:a16="http://schemas.microsoft.com/office/drawing/2014/main" val="20002"/>
+                    </a:ext>
+                  </a:extLst>
+                </a:gridCol>
+                <a:gridCol w="1066800">
+                  <a:extLst>
+                    <a:ext uri="{9D8B030D-6E8A-4147-A177-3AD203B41FA5}">
+                      <a16:colId xmlns:a16="http://schemas.microsoft.com/office/drawing/2014/main" val="20003"/>
+                    </a:ext>
+                  </a:extLst>
+                </a:gridCol>
+                <a:gridCol w="990602">
+                  <a:extLst>
+                    <a:ext uri="{9D8B030D-6E8A-4147-A177-3AD203B41FA5}">
+                      <a16:colId xmlns:a16="http://schemas.microsoft.com/office/drawing/2014/main" val="20004"/>
+                    </a:ext>
+                  </a:extLst>
+                </a:gridCol>
               </a:tblGrid>
               <a:tr h="370840">
                 <a:tc>
@@ -16257,14 +15945,11 @@
                     <a:lstStyle/>
                     <a:p>
                       <a:r>
-                        <a:rPr lang="en-US" sz="2400" dirty="0" smtClean="0">
+                        <a:rPr lang="en-US" sz="2400" dirty="0">
                           <a:latin typeface="Book Antiqua" panose="02040602050305030304" pitchFamily="18" charset="0"/>
                         </a:rPr>
                         <a:t>X</a:t>
                       </a:r>
-                      <a:endParaRPr lang="en-US" sz="2400" dirty="0">
-                        <a:latin typeface="Book Antiqua" panose="02040602050305030304" pitchFamily="18" charset="0"/>
-                      </a:endParaRPr>
                     </a:p>
                   </a:txBody>
                   <a:tcPr/>
@@ -16275,14 +15960,11 @@
                     <a:lstStyle/>
                     <a:p>
                       <a:r>
-                        <a:rPr lang="en-US" sz="2400" dirty="0" smtClean="0">
+                        <a:rPr lang="en-US" sz="2400" dirty="0">
                           <a:latin typeface="Book Antiqua" panose="02040602050305030304" pitchFamily="18" charset="0"/>
                         </a:rPr>
                         <a:t>1</a:t>
                       </a:r>
-                      <a:endParaRPr lang="en-US" sz="2400" dirty="0">
-                        <a:latin typeface="Book Antiqua" panose="02040602050305030304" pitchFamily="18" charset="0"/>
-                      </a:endParaRPr>
                     </a:p>
                   </a:txBody>
                   <a:tcPr/>
@@ -16293,14 +15975,11 @@
                     <a:lstStyle/>
                     <a:p>
                       <a:r>
-                        <a:rPr lang="en-US" sz="2400" dirty="0" smtClean="0">
+                        <a:rPr lang="en-US" sz="2400" dirty="0">
                           <a:latin typeface="Book Antiqua" panose="02040602050305030304" pitchFamily="18" charset="0"/>
                         </a:rPr>
                         <a:t>2</a:t>
                       </a:r>
-                      <a:endParaRPr lang="en-US" sz="2400" dirty="0">
-                        <a:latin typeface="Book Antiqua" panose="02040602050305030304" pitchFamily="18" charset="0"/>
-                      </a:endParaRPr>
                     </a:p>
                   </a:txBody>
                   <a:tcPr/>
@@ -16311,14 +15990,11 @@
                     <a:lstStyle/>
                     <a:p>
                       <a:r>
-                        <a:rPr lang="en-US" sz="2400" dirty="0" smtClean="0">
+                        <a:rPr lang="en-US" sz="2400" dirty="0">
                           <a:latin typeface="Book Antiqua" panose="02040602050305030304" pitchFamily="18" charset="0"/>
                         </a:rPr>
                         <a:t>3</a:t>
                       </a:r>
-                      <a:endParaRPr lang="en-US" sz="2400" dirty="0">
-                        <a:latin typeface="Book Antiqua" panose="02040602050305030304" pitchFamily="18" charset="0"/>
-                      </a:endParaRPr>
                     </a:p>
                   </a:txBody>
                   <a:tcPr/>
@@ -16329,18 +16005,20 @@
                     <a:lstStyle/>
                     <a:p>
                       <a:r>
-                        <a:rPr lang="en-US" sz="2400" dirty="0" smtClean="0">
+                        <a:rPr lang="en-US" sz="2400" dirty="0">
                           <a:latin typeface="Book Antiqua" panose="02040602050305030304" pitchFamily="18" charset="0"/>
                         </a:rPr>
                         <a:t>4</a:t>
                       </a:r>
-                      <a:endParaRPr lang="en-US" sz="2400" dirty="0">
-                        <a:latin typeface="Book Antiqua" panose="02040602050305030304" pitchFamily="18" charset="0"/>
-                      </a:endParaRPr>
                     </a:p>
                   </a:txBody>
                   <a:tcPr/>
                 </a:tc>
+                <a:extLst>
+                  <a:ext uri="{0D108BD9-81ED-4DB2-BD59-A6C34878D82A}">
+                    <a16:rowId xmlns:a16="http://schemas.microsoft.com/office/drawing/2014/main" val="10000"/>
+                  </a:ext>
+                </a:extLst>
               </a:tr>
               <a:tr h="370840">
                 <a:tc>
@@ -16349,14 +16027,11 @@
                     <a:lstStyle/>
                     <a:p>
                       <a:r>
-                        <a:rPr lang="en-US" sz="2400" dirty="0" smtClean="0">
+                        <a:rPr lang="en-US" sz="2400" dirty="0">
                           <a:latin typeface="Book Antiqua" panose="02040602050305030304" pitchFamily="18" charset="0"/>
                         </a:rPr>
                         <a:t>f(x)</a:t>
                       </a:r>
-                      <a:endParaRPr lang="en-US" sz="2400" dirty="0">
-                        <a:latin typeface="Book Antiqua" panose="02040602050305030304" pitchFamily="18" charset="0"/>
-                      </a:endParaRPr>
                     </a:p>
                   </a:txBody>
                   <a:tcPr/>
@@ -16367,14 +16042,11 @@
                     <a:lstStyle/>
                     <a:p>
                       <a:r>
-                        <a:rPr lang="en-US" sz="2400" dirty="0" smtClean="0">
+                        <a:rPr lang="en-US" sz="2400" dirty="0">
                           <a:latin typeface="Book Antiqua" panose="02040602050305030304" pitchFamily="18" charset="0"/>
                         </a:rPr>
                         <a:t>2</a:t>
                       </a:r>
-                      <a:endParaRPr lang="en-US" sz="2400" dirty="0">
-                        <a:latin typeface="Book Antiqua" panose="02040602050305030304" pitchFamily="18" charset="0"/>
-                      </a:endParaRPr>
                     </a:p>
                   </a:txBody>
                   <a:tcPr/>
@@ -16385,14 +16057,11 @@
                     <a:lstStyle/>
                     <a:p>
                       <a:r>
-                        <a:rPr lang="en-US" sz="2400" dirty="0" smtClean="0">
+                        <a:rPr lang="en-US" sz="2400" dirty="0">
                           <a:latin typeface="Book Antiqua" panose="02040602050305030304" pitchFamily="18" charset="0"/>
                         </a:rPr>
                         <a:t>7</a:t>
                       </a:r>
-                      <a:endParaRPr lang="en-US" sz="2400" dirty="0">
-                        <a:latin typeface="Book Antiqua" panose="02040602050305030304" pitchFamily="18" charset="0"/>
-                      </a:endParaRPr>
                     </a:p>
                   </a:txBody>
                   <a:tcPr/>
@@ -16403,14 +16072,11 @@
                     <a:lstStyle/>
                     <a:p>
                       <a:r>
-                        <a:rPr lang="en-US" sz="2400" dirty="0" smtClean="0">
+                        <a:rPr lang="en-US" sz="2400" dirty="0">
                           <a:latin typeface="Book Antiqua" panose="02040602050305030304" pitchFamily="18" charset="0"/>
                         </a:rPr>
                         <a:t>14</a:t>
                       </a:r>
-                      <a:endParaRPr lang="en-US" sz="2400" dirty="0">
-                        <a:latin typeface="Book Antiqua" panose="02040602050305030304" pitchFamily="18" charset="0"/>
-                      </a:endParaRPr>
                     </a:p>
                   </a:txBody>
                   <a:tcPr/>
@@ -16421,18 +16087,20 @@
                     <a:lstStyle/>
                     <a:p>
                       <a:r>
-                        <a:rPr lang="en-US" sz="2400" dirty="0" smtClean="0">
+                        <a:rPr lang="en-US" sz="2400" dirty="0">
                           <a:latin typeface="Book Antiqua" panose="02040602050305030304" pitchFamily="18" charset="0"/>
                         </a:rPr>
                         <a:t>23</a:t>
                       </a:r>
-                      <a:endParaRPr lang="en-US" sz="2400" dirty="0">
-                        <a:latin typeface="Book Antiqua" panose="02040602050305030304" pitchFamily="18" charset="0"/>
-                      </a:endParaRPr>
                     </a:p>
                   </a:txBody>
                   <a:tcPr/>
                 </a:tc>
+                <a:extLst>
+                  <a:ext uri="{0D108BD9-81ED-4DB2-BD59-A6C34878D82A}">
+                    <a16:rowId xmlns:a16="http://schemas.microsoft.com/office/drawing/2014/main" val="10001"/>
+                  </a:ext>
+                </a:extLst>
               </a:tr>
             </a:tbl>
           </a:graphicData>
@@ -16455,7 +16123,7 @@
           <a:p>
             <a:fld id="{99B68BAB-A03D-4CA4-9CFD-69F8D13E3804}" type="datetime1">
               <a:rPr lang="en-US" smtClean="0"/>
-              <a:t>5/6/2025</a:t>
+              <a:t>6/29/2025</a:t>
             </a:fld>
             <a:endParaRPr lang="en-US"/>
           </a:p>
@@ -16477,10 +16145,9 @@
           <a:lstStyle/>
           <a:p>
             <a:r>
-              <a:rPr lang="en-US" smtClean="0"/>
+              <a:rPr lang="en-US"/>
               <a:t>By: Arjun Singh Saud</a:t>
             </a:r>
-            <a:endParaRPr lang="en-US"/>
           </a:p>
         </p:txBody>
       </p:sp>
@@ -16519,13 +16186,6 @@
     <a:masterClrMapping/>
   </p:clrMapOvr>
   <p:transition/>
-  <p:timing>
-    <p:tnLst>
-      <p:par>
-        <p:cTn id="1" dur="indefinite" restart="never" nodeType="tmRoot"/>
-      </p:par>
-    </p:tnLst>
-  </p:timing>
 </p:sld>
 </file>
 
@@ -16569,14 +16229,11 @@
           <a:lstStyle/>
           <a:p>
             <a:r>
-              <a:rPr lang="en-US" b="1" dirty="0" smtClean="0">
+              <a:rPr lang="en-US" b="1" dirty="0">
                 <a:latin typeface="Book Antiqua" pitchFamily="18" charset="0"/>
               </a:rPr>
               <a:t>Polynomial Curve Fitting</a:t>
             </a:r>
-            <a:endParaRPr lang="en-US" b="1" dirty="0">
-              <a:latin typeface="Book Antiqua" pitchFamily="18" charset="0"/>
-            </a:endParaRPr>
           </a:p>
         </p:txBody>
       </p:sp>
@@ -16608,37 +16265,37 @@
                   <a:buNone/>
                 </a:pPr>
                 <a:r>
-                  <a:rPr lang="en-US" sz="2400" b="1" u="sng" dirty="0" smtClean="0">
+                  <a:rPr lang="en-US" sz="2400" b="1" u="sng" dirty="0">
                     <a:latin typeface="Book Antiqua" panose="02040602050305030304" pitchFamily="18" charset="0"/>
                   </a:rPr>
                   <a:t>Iteration 1: </a:t>
                 </a:r>
                 <a:r>
-                  <a:rPr lang="en-US" sz="2400" dirty="0" smtClean="0">
+                  <a:rPr lang="en-US" sz="2400" dirty="0">
                     <a:latin typeface="Book Antiqua" panose="02040602050305030304" pitchFamily="18" charset="0"/>
                   </a:rPr>
                   <a:t> </a:t>
                 </a:r>
                 <a:r>
-                  <a:rPr lang="en-US" sz="2400" i="1" dirty="0" smtClean="0">
+                  <a:rPr lang="en-US" sz="2400" i="1" dirty="0">
                     <a:latin typeface="Book Antiqua" panose="02040602050305030304" pitchFamily="18" charset="0"/>
                   </a:rPr>
                   <a:t>x</a:t>
                 </a:r>
                 <a:r>
-                  <a:rPr lang="en-US" sz="2400" dirty="0" smtClean="0">
+                  <a:rPr lang="en-US" sz="2400" dirty="0">
                     <a:latin typeface="Book Antiqua" panose="02040602050305030304" pitchFamily="18" charset="0"/>
                   </a:rPr>
                   <a:t>=1, y=f(</a:t>
                 </a:r>
                 <a:r>
-                  <a:rPr lang="en-US" sz="2400" i="1" dirty="0" smtClean="0">
+                  <a:rPr lang="en-US" sz="2400" i="1" dirty="0">
                     <a:latin typeface="Book Antiqua" panose="02040602050305030304" pitchFamily="18" charset="0"/>
                   </a:rPr>
                   <a:t>x</a:t>
                 </a:r>
                 <a:r>
-                  <a:rPr lang="en-US" sz="2400" dirty="0" smtClean="0">
+                  <a:rPr lang="en-US" sz="2400" dirty="0">
                     <a:latin typeface="Book Antiqua" panose="02040602050305030304" pitchFamily="18" charset="0"/>
                   </a:rPr>
                   <a:t>)=2   </a:t>
@@ -16661,7 +16318,7 @@
                     </m:r>
                   </m:oMath>
                 </a14:m>
-                <a:endParaRPr lang="en-US" sz="2400" dirty="0" smtClean="0">
+                <a:endParaRPr lang="en-US" sz="2400" dirty="0">
                   <a:latin typeface="Book Antiqua" panose="02040602050305030304" pitchFamily="18" charset="0"/>
                 </a:endParaRPr>
               </a:p>
@@ -16903,7 +16560,7 @@
                     </m:oMath>
                   </m:oMathPara>
                 </a14:m>
-                <a:endParaRPr lang="en-US" sz="2400" b="0" dirty="0" smtClean="0">
+                <a:endParaRPr lang="en-US" sz="2400" b="0" dirty="0">
                   <a:latin typeface="Book Antiqua" panose="02040602050305030304" pitchFamily="18" charset="0"/>
                 </a:endParaRPr>
               </a:p>
@@ -17157,7 +16814,7 @@
                     </m:oMath>
                   </m:oMathPara>
                 </a14:m>
-                <a:endParaRPr lang="en-US" sz="2400" dirty="0" smtClean="0">
+                <a:endParaRPr lang="en-US" sz="2400" dirty="0">
                   <a:latin typeface="Book Antiqua" panose="02040602050305030304" pitchFamily="18" charset="0"/>
                 </a:endParaRPr>
               </a:p>
@@ -17444,7 +17101,7 @@
                 <a:pPr marL="0" indent="0" algn="just" fontAlgn="base">
                   <a:buNone/>
                 </a:pPr>
-                <a:endParaRPr lang="en-US" sz="2300" dirty="0" smtClean="0">
+                <a:endParaRPr lang="en-US" sz="2300" dirty="0">
                   <a:latin typeface="Book Antiqua" panose="02040602050305030304" pitchFamily="18" charset="0"/>
                 </a:endParaRPr>
               </a:p>
@@ -17456,37 +17113,13 @@
                   <a:rPr lang="en-US" sz="2000" b="1" u="sng" dirty="0">
                     <a:latin typeface="Book Antiqua" panose="02040602050305030304" pitchFamily="18" charset="0"/>
                   </a:rPr>
-                  <a:t>Iteration </a:t>
-                </a:r>
-                <a:r>
-                  <a:rPr lang="en-US" sz="2000" b="1" u="sng" dirty="0" smtClean="0">
-                    <a:latin typeface="Book Antiqua" panose="02040602050305030304" pitchFamily="18" charset="0"/>
-                  </a:rPr>
-                  <a:t>2: </a:t>
-                </a:r>
-                <a:r>
-                  <a:rPr lang="en-US" sz="2000" dirty="0" smtClean="0">
-                    <a:latin typeface="Book Antiqua" panose="02040602050305030304" pitchFamily="18" charset="0"/>
-                  </a:rPr>
-                  <a:t> </a:t>
-                </a:r>
-                <a:r>
-                  <a:rPr lang="en-US" sz="2000" i="1" dirty="0" smtClean="0">
-                    <a:latin typeface="Book Antiqua" panose="02040602050305030304" pitchFamily="18" charset="0"/>
-                  </a:rPr>
-                  <a:t>x</a:t>
-                </a:r>
-                <a:r>
-                  <a:rPr lang="en-US" sz="2000" dirty="0" smtClean="0">
-                    <a:latin typeface="Book Antiqua" panose="02040602050305030304" pitchFamily="18" charset="0"/>
-                  </a:rPr>
-                  <a:t>=2, </a:t>
+                  <a:t>Iteration 2: </a:t>
                 </a:r>
                 <a:r>
                   <a:rPr lang="en-US" sz="2000" dirty="0">
                     <a:latin typeface="Book Antiqua" panose="02040602050305030304" pitchFamily="18" charset="0"/>
                   </a:rPr>
-                  <a:t>y=f(</a:t>
+                  <a:t> </a:t>
                 </a:r>
                 <a:r>
                   <a:rPr lang="en-US" sz="2000" i="1" dirty="0">
@@ -17495,14 +17128,23 @@
                   <a:t>x</a:t>
                 </a:r>
                 <a:r>
-                  <a:rPr lang="en-US" sz="2000" dirty="0" smtClean="0">
+                  <a:rPr lang="en-US" sz="2000" dirty="0">
+                    <a:latin typeface="Book Antiqua" panose="02040602050305030304" pitchFamily="18" charset="0"/>
+                  </a:rPr>
+                  <a:t>=2, y=f(</a:t>
+                </a:r>
+                <a:r>
+                  <a:rPr lang="en-US" sz="2000" i="1" dirty="0">
+                    <a:latin typeface="Book Antiqua" panose="02040602050305030304" pitchFamily="18" charset="0"/>
+                  </a:rPr>
+                  <a:t>x</a:t>
+                </a:r>
+                <a:r>
+                  <a:rPr lang="en-US" sz="2000" dirty="0">
                     <a:latin typeface="Book Antiqua" panose="02040602050305030304" pitchFamily="18" charset="0"/>
                   </a:rPr>
                   <a:t>)=7</a:t>
                 </a:r>
-                <a:endParaRPr lang="en-US" sz="2000" dirty="0">
-                  <a:latin typeface="Book Antiqua" panose="02040602050305030304" pitchFamily="18" charset="0"/>
-                </a:endParaRPr>
               </a:p>
               <a:p>
                 <a:pPr marL="0" indent="0" algn="just" fontAlgn="base">
@@ -18250,7 +17892,7 @@
                 <a:pPr marL="0" indent="0" algn="just" fontAlgn="base">
                   <a:buNone/>
                 </a:pPr>
-                <a:endParaRPr lang="en-US" sz="2300" dirty="0" smtClean="0">
+                <a:endParaRPr lang="en-US" sz="2300" dirty="0">
                   <a:latin typeface="Book Antiqua" panose="02040602050305030304" pitchFamily="18" charset="0"/>
                 </a:endParaRPr>
               </a:p>
@@ -18259,7 +17901,7 @@
                   <a:buNone/>
                 </a:pPr>
                 <a:r>
-                  <a:rPr lang="en-US" sz="2800" dirty="0" smtClean="0">
+                  <a:rPr lang="en-US" sz="2800" dirty="0">
                     <a:latin typeface="Book Antiqua" panose="02040602050305030304" pitchFamily="18" charset="0"/>
                   </a:rPr>
                   <a:t>In the same way perform iteration 3 and 4.</a:t>
@@ -18277,7 +17919,7 @@
                 <a:pPr marL="0" indent="0" algn="just" fontAlgn="base">
                   <a:buNone/>
                 </a:pPr>
-                <a:endParaRPr lang="en-US" sz="2600" b="0" dirty="0" smtClean="0">
+                <a:endParaRPr lang="en-US" sz="2600" b="0" dirty="0">
                   <a:latin typeface="Book Antiqua" panose="02040602050305030304" pitchFamily="18" charset="0"/>
                 </a:endParaRPr>
               </a:p>
@@ -18285,7 +17927,7 @@
                 <a:pPr marL="0" indent="0" algn="just" fontAlgn="base">
                   <a:buNone/>
                 </a:pPr>
-                <a:endParaRPr lang="en-US" sz="2600" dirty="0" smtClean="0">
+                <a:endParaRPr lang="en-US" sz="2600" dirty="0">
                   <a:latin typeface="Book Antiqua" panose="02040602050305030304" pitchFamily="18" charset="0"/>
                 </a:endParaRPr>
               </a:p>
@@ -18293,7 +17935,7 @@
                 <a:pPr marL="0" indent="0" algn="just" fontAlgn="base">
                   <a:buNone/>
                 </a:pPr>
-                <a:endParaRPr lang="en-US" sz="2600" dirty="0" smtClean="0">
+                <a:endParaRPr lang="en-US" sz="2600" dirty="0">
                   <a:latin typeface="Book Antiqua" panose="02040602050305030304" pitchFamily="18" charset="0"/>
                 </a:endParaRPr>
               </a:p>
@@ -18355,7 +17997,7 @@
           <a:p>
             <a:fld id="{9F367F0D-82C3-4101-A633-87ABAD04264C}" type="datetime1">
               <a:rPr lang="en-US" smtClean="0"/>
-              <a:t>5/6/2025</a:t>
+              <a:t>6/29/2025</a:t>
             </a:fld>
             <a:endParaRPr lang="en-US"/>
           </a:p>
@@ -18377,10 +18019,9 @@
           <a:lstStyle/>
           <a:p>
             <a:r>
-              <a:rPr lang="en-US" smtClean="0"/>
+              <a:rPr lang="en-US"/>
               <a:t>By: Arjun Singh Saud</a:t>
             </a:r>
-            <a:endParaRPr lang="en-US"/>
           </a:p>
         </p:txBody>
       </p:sp>
@@ -18419,13 +18060,6 @@
     <a:masterClrMapping/>
   </p:clrMapOvr>
   <p:transition/>
-  <p:timing>
-    <p:tnLst>
-      <p:par>
-        <p:cTn id="1" dur="indefinite" restart="never" nodeType="tmRoot"/>
-      </p:par>
-    </p:tnLst>
-  </p:timing>
 </p:sld>
 </file>
 
@@ -18465,7 +18099,7 @@
           <a:p>
             <a:pPr eaLnBrk="1" hangingPunct="1"/>
             <a:r>
-              <a:rPr lang="en-US" altLang="en-US" sz="3600" b="1" dirty="0" smtClean="0">
+              <a:rPr lang="en-US" altLang="en-US" sz="3600" b="1" dirty="0">
                 <a:latin typeface="Book Antiqua" pitchFamily="18" charset="0"/>
               </a:rPr>
               <a:t>Logistic Regression</a:t>
@@ -18492,16 +18126,31 @@
           <a:p>
             <a:pPr marL="225425" indent="-225425" algn="just"/>
             <a:r>
-              <a:rPr lang="en-US" sz="2800" dirty="0" smtClean="0">
+              <a:rPr lang="en-US" sz="2800" dirty="0">
                 <a:latin typeface="Book Antiqua" pitchFamily="18" charset="0"/>
               </a:rPr>
-              <a:t>Logistic regression is one of the most popular machine learning algorithms for binary classification. This is because it is a simple algorithm that performs very well on a wide range of problems.</a:t>
+              <a:t>Logistic regression is one of the most popular machine learning algorithms for </a:t>
+            </a:r>
+            <a:r>
+              <a:rPr lang="en-US" sz="2800" dirty="0">
+                <a:solidFill>
+                  <a:srgbClr val="00B050"/>
+                </a:solidFill>
+                <a:latin typeface="Book Antiqua" pitchFamily="18" charset="0"/>
+              </a:rPr>
+              <a:t>binary classification</a:t>
+            </a:r>
+            <a:r>
+              <a:rPr lang="en-US" sz="2800" dirty="0">
+                <a:latin typeface="Book Antiqua" pitchFamily="18" charset="0"/>
+              </a:rPr>
+              <a:t>. This is because it is a simple algorithm that performs very well on a wide range of problems.</a:t>
             </a:r>
           </a:p>
           <a:p>
             <a:pPr marL="225425" indent="-225425" algn="just"/>
             <a:r>
-              <a:rPr lang="en-US" sz="2800" dirty="0" smtClean="0">
+              <a:rPr lang="en-US" sz="2800" dirty="0">
                 <a:latin typeface="Book Antiqua" pitchFamily="18" charset="0"/>
               </a:rPr>
               <a:t>We want to predict a variable            , where 0 is called negative class, while 1 is called positive class. Such task is known as binary classification.</a:t>
@@ -18512,7 +18161,7 @@
               <a:buNone/>
             </a:pPr>
             <a:r>
-              <a:rPr lang="en-US" sz="2800" dirty="0" smtClean="0">
+              <a:rPr lang="en-US" sz="2800" dirty="0">
                 <a:latin typeface="Book Antiqua" pitchFamily="18" charset="0"/>
               </a:rPr>
               <a:t>	</a:t>
@@ -18719,23 +18368,23 @@
           <a:graphicData uri="http://schemas.openxmlformats.org/presentationml/2006/ole">
             <mc:AlternateContent xmlns:mc="http://schemas.openxmlformats.org/markup-compatibility/2006">
               <mc:Choice xmlns:v="urn:schemas-microsoft-com:vml" Requires="v">
-                <p:oleObj spid="_x0000_s1059" name="Equation" r:id="rId3" imgW="583920" imgH="203040" progId="Equation.3">
+                <p:oleObj name="Equation" r:id="rId2" imgW="583920" imgH="203040" progId="Equation.3">
                   <p:embed/>
                 </p:oleObj>
               </mc:Choice>
               <mc:Fallback>
-                <p:oleObj name="Equation" r:id="rId3" imgW="583920" imgH="203040" progId="Equation.3">
+                <p:oleObj name="Equation" r:id="rId2" imgW="583920" imgH="203040" progId="Equation.3">
                   <p:embed/>
                   <p:pic>
                     <p:nvPicPr>
-                      <p:cNvPr id="0" name=""/>
+                      <p:cNvPr id="33795" name="Object 3"/>
                       <p:cNvPicPr>
                         <a:picLocks noChangeAspect="1" noChangeArrowheads="1"/>
                       </p:cNvPicPr>
                       <p:nvPr/>
                     </p:nvPicPr>
                     <p:blipFill>
-                      <a:blip r:embed="rId4">
+                      <a:blip r:embed="rId3">
                         <a:extLst>
                           <a:ext uri="{28A0092B-C50C-407E-A947-70E740481C1C}">
                             <a14:useLocalDpi xmlns:a14="http://schemas.microsoft.com/office/drawing/2010/main" val="0"/>
@@ -18790,7 +18439,7 @@
           <a:p>
             <a:fld id="{194F97CD-9984-4A1F-B134-662BA711C079}" type="datetime1">
               <a:rPr lang="en-US" smtClean="0"/>
-              <a:t>5/6/2025</a:t>
+              <a:t>6/29/2025</a:t>
             </a:fld>
             <a:endParaRPr lang="en-US"/>
           </a:p>
@@ -18812,7 +18461,7 @@
           <a:lstStyle/>
           <a:p>
             <a:r>
-              <a:rPr lang="en-US" smtClean="0"/>
+              <a:rPr lang="en-US"/>
               <a:t>By: Arjun Singh Saud</a:t>
             </a:r>
             <a:endParaRPr lang="en-US" dirty="0"/>
@@ -18830,13 +18479,6 @@
     <a:masterClrMapping/>
   </p:clrMapOvr>
   <p:transition/>
-  <p:timing>
-    <p:tnLst>
-      <p:par>
-        <p:cTn id="1" dur="indefinite" restart="never" nodeType="tmRoot"/>
-      </p:par>
-    </p:tnLst>
-  </p:timing>
 </p:sld>
 </file>
 
@@ -18876,7 +18518,7 @@
           <a:p>
             <a:pPr eaLnBrk="1" hangingPunct="1"/>
             <a:r>
-              <a:rPr lang="en-US" altLang="en-US" sz="3600" b="1" dirty="0" smtClean="0">
+              <a:rPr lang="en-US" altLang="en-US" sz="3600" b="1" dirty="0">
                 <a:latin typeface="Book Antiqua" pitchFamily="18" charset="0"/>
               </a:rPr>
               <a:t>Logistic Regression</a:t>
@@ -18908,7 +18550,7 @@
           <a:p>
             <a:pPr marL="225425" indent="-225425" algn="just"/>
             <a:r>
-              <a:rPr lang="en-US" sz="2800" dirty="0" smtClean="0">
+              <a:rPr lang="en-US" sz="2800" dirty="0">
                 <a:latin typeface="Book Antiqua" pitchFamily="18" charset="0"/>
               </a:rPr>
               <a:t>The heart of the logistic regression technique is logistic function and is defined as:</a:t>
@@ -18916,14 +18558,14 @@
           </a:p>
           <a:p>
             <a:pPr marL="225425" indent="-225425" algn="just"/>
-            <a:endParaRPr lang="en-US" sz="2800" dirty="0" smtClean="0">
+            <a:endParaRPr lang="en-US" sz="2800" dirty="0">
               <a:latin typeface="Book Antiqua" pitchFamily="18" charset="0"/>
             </a:endParaRPr>
           </a:p>
           <a:p>
             <a:pPr marL="225425" indent="-225425" algn="just"/>
             <a:r>
-              <a:rPr lang="en-US" sz="2800" dirty="0" smtClean="0">
+              <a:rPr lang="en-US" sz="2800" dirty="0">
                 <a:latin typeface="Book Antiqua" pitchFamily="18" charset="0"/>
               </a:rPr>
               <a:t>Logistic function transforms the input into the range [0, 1]. Smallest negative numbers results in values close to zero and the larger positive numbers results in values close to one.</a:t>
@@ -18932,7 +18574,7 @@
           <a:p>
             <a:pPr marL="225425" indent="-225425" algn="just"/>
             <a:r>
-              <a:rPr lang="en-US" sz="2800" dirty="0" smtClean="0">
+              <a:rPr lang="en-US" sz="2800" dirty="0">
                 <a:latin typeface="Book Antiqua" pitchFamily="18" charset="0"/>
               </a:rPr>
               <a:t>If there are two input variable, logistic regression has two coefficients just like linear regression.</a:t>
@@ -19107,23 +18749,23 @@
           <a:graphicData uri="http://schemas.openxmlformats.org/presentationml/2006/ole">
             <mc:AlternateContent xmlns:mc="http://schemas.openxmlformats.org/markup-compatibility/2006">
               <mc:Choice xmlns:v="urn:schemas-microsoft-com:vml" Requires="v">
-                <p:oleObj spid="_x0000_s2116" name="Equation" r:id="rId3" imgW="1244520" imgH="228600" progId="Equation.3">
+                <p:oleObj name="Equation" r:id="rId2" imgW="1244520" imgH="228600" progId="Equation.3">
                   <p:embed/>
                 </p:oleObj>
               </mc:Choice>
               <mc:Fallback>
-                <p:oleObj name="Equation" r:id="rId3" imgW="1244520" imgH="228600" progId="Equation.3">
+                <p:oleObj name="Equation" r:id="rId2" imgW="1244520" imgH="228600" progId="Equation.3">
                   <p:embed/>
                   <p:pic>
                     <p:nvPicPr>
-                      <p:cNvPr id="0" name=""/>
+                      <p:cNvPr id="41987" name="Object 3"/>
                       <p:cNvPicPr>
                         <a:picLocks noChangeAspect="1" noChangeArrowheads="1"/>
                       </p:cNvPicPr>
                       <p:nvPr/>
                     </p:nvPicPr>
                     <p:blipFill>
-                      <a:blip r:embed="rId4"/>
+                      <a:blip r:embed="rId3"/>
                       <a:srcRect/>
                       <a:stretch>
                         <a:fillRect/>
@@ -19171,23 +18813,23 @@
           <a:graphicData uri="http://schemas.openxmlformats.org/presentationml/2006/ole">
             <mc:AlternateContent xmlns:mc="http://schemas.openxmlformats.org/markup-compatibility/2006">
               <mc:Choice xmlns:v="urn:schemas-microsoft-com:vml" Requires="v">
-                <p:oleObj spid="_x0000_s2117" name="Equation" r:id="rId5" imgW="914400" imgH="393700" progId="Equation.3">
+                <p:oleObj name="Equation" r:id="rId4" imgW="914400" imgH="393700" progId="Equation.3">
                   <p:embed/>
                 </p:oleObj>
               </mc:Choice>
               <mc:Fallback>
-                <p:oleObj name="Equation" r:id="rId5" imgW="914400" imgH="393700" progId="Equation.3">
+                <p:oleObj name="Equation" r:id="rId4" imgW="914400" imgH="393700" progId="Equation.3">
                   <p:embed/>
                   <p:pic>
                     <p:nvPicPr>
-                      <p:cNvPr id="0" name=""/>
+                      <p:cNvPr id="41988" name="Object 4"/>
                       <p:cNvPicPr>
                         <a:picLocks noChangeAspect="1" noChangeArrowheads="1"/>
                       </p:cNvPicPr>
                       <p:nvPr/>
                     </p:nvPicPr>
                     <p:blipFill>
-                      <a:blip r:embed="rId6">
+                      <a:blip r:embed="rId5">
                         <a:extLst>
                           <a:ext uri="{28A0092B-C50C-407E-A947-70E740481C1C}">
                             <a14:useLocalDpi xmlns:a14="http://schemas.microsoft.com/office/drawing/2010/main" val="0"/>
@@ -19242,7 +18884,7 @@
           <a:p>
             <a:fld id="{2D80F32B-EA6F-41F5-99DE-F82067F040D7}" type="datetime1">
               <a:rPr lang="en-US" smtClean="0"/>
-              <a:t>5/6/2025</a:t>
+              <a:t>6/29/2025</a:t>
             </a:fld>
             <a:endParaRPr lang="en-US"/>
           </a:p>
@@ -19264,7 +18906,7 @@
           <a:lstStyle/>
           <a:p>
             <a:r>
-              <a:rPr lang="en-US" smtClean="0"/>
+              <a:rPr lang="en-US"/>
               <a:t>By: Arjun Singh Saud</a:t>
             </a:r>
             <a:endParaRPr lang="en-US" dirty="0"/>
@@ -19282,13 +18924,6 @@
     <a:masterClrMapping/>
   </p:clrMapOvr>
   <p:transition/>
-  <p:timing>
-    <p:tnLst>
-      <p:par>
-        <p:cTn id="1" dur="indefinite" restart="never" nodeType="tmRoot"/>
-      </p:par>
-    </p:tnLst>
-  </p:timing>
 </p:sld>
 </file>
 
